--- a/docs/Scientific-Poster.pptx
+++ b/docs/Scientific-Poster.pptx
@@ -5,9 +5,9 @@
     <p:sldMasterId id="2147483648" r:id="rId1"/>
   </p:sldMasterIdLst>
   <p:sldIdLst>
-    <p:sldId id="256" r:id="rId7"/>
+    <p:sldId id="256" r:id="rId2"/>
   </p:sldIdLst>
-  <p:sldSz cx="43891200" cy="32918400" type="screen4x3"/>
+  <p:sldSz cx="43891200" cy="32918400"/>
   <p:notesSz cx="6858000" cy="9144000"/>
   <p:defaultTextStyle>
     <a:defPPr>
@@ -104,6 +104,22 @@
       </a:defRPr>
     </a:lvl9pPr>
   </p:defaultTextStyle>
+  <p:extLst>
+    <p:ext uri="{EFAFB233-063F-42B5-8137-9DF3F51BA10A}">
+      <p15:sldGuideLst xmlns:p15="http://schemas.microsoft.com/office/powerpoint/2012/main">
+        <p15:guide id="1" orient="horz" pos="2160">
+          <p15:clr>
+            <a:srgbClr val="A4A3A4"/>
+          </p15:clr>
+        </p15:guide>
+        <p15:guide id="2" pos="2880">
+          <p15:clr>
+            <a:srgbClr val="A4A3A4"/>
+          </p15:clr>
+        </p15:guide>
+      </p15:sldGuideLst>
+    </p:ext>
+  </p:extLst>
 </p:presentation>
 </file>
 
@@ -145,10 +161,9 @@
           <a:lstStyle/>
           <a:p>
             <a:r>
-              <a:rPr lang="en-US" smtClean="0"/>
+              <a:rPr lang="en-US"/>
               <a:t>Click to edit Master title style</a:t>
             </a:r>
-            <a:endParaRPr lang="en-US"/>
           </a:p>
         </p:txBody>
       </p:sp>
@@ -264,10 +279,9 @@
           </a:lstStyle>
           <a:p>
             <a:r>
-              <a:rPr lang="en-US" smtClean="0"/>
+              <a:rPr lang="en-US"/>
               <a:t>Click to edit Master subtitle style</a:t>
             </a:r>
-            <a:endParaRPr lang="en-US"/>
           </a:p>
         </p:txBody>
       </p:sp>
@@ -288,7 +302,7 @@
           <a:p>
             <a:fld id="{5BCAD085-E8A6-8845-BD4E-CB4CCA059FC4}" type="datetimeFigureOut">
               <a:rPr lang="en-US" smtClean="0"/>
-              <a:t>1/27/13</a:t>
+              <a:t>6/30/2026</a:t>
             </a:fld>
             <a:endParaRPr lang="en-US"/>
           </a:p>
@@ -382,10 +396,9 @@
           <a:lstStyle/>
           <a:p>
             <a:r>
-              <a:rPr lang="en-US" smtClean="0"/>
+              <a:rPr lang="en-US"/>
               <a:t>Click to edit Master title style</a:t>
             </a:r>
-            <a:endParaRPr lang="en-US"/>
           </a:p>
         </p:txBody>
       </p:sp>
@@ -406,38 +419,37 @@
           <a:p>
             <a:pPr lvl="0"/>
             <a:r>
-              <a:rPr lang="en-US" smtClean="0"/>
+              <a:rPr lang="en-US"/>
               <a:t>Click to edit Master text styles</a:t>
             </a:r>
           </a:p>
           <a:p>
             <a:pPr lvl="1"/>
             <a:r>
-              <a:rPr lang="en-US" smtClean="0"/>
+              <a:rPr lang="en-US"/>
               <a:t>Second level</a:t>
             </a:r>
           </a:p>
           <a:p>
             <a:pPr lvl="2"/>
             <a:r>
-              <a:rPr lang="en-US" smtClean="0"/>
+              <a:rPr lang="en-US"/>
               <a:t>Third level</a:t>
             </a:r>
           </a:p>
           <a:p>
             <a:pPr lvl="3"/>
             <a:r>
-              <a:rPr lang="en-US" smtClean="0"/>
+              <a:rPr lang="en-US"/>
               <a:t>Fourth level</a:t>
             </a:r>
           </a:p>
           <a:p>
             <a:pPr lvl="4"/>
             <a:r>
-              <a:rPr lang="en-US" smtClean="0"/>
+              <a:rPr lang="en-US"/>
               <a:t>Fifth level</a:t>
             </a:r>
-            <a:endParaRPr lang="en-US"/>
           </a:p>
         </p:txBody>
       </p:sp>
@@ -458,7 +470,7 @@
           <a:p>
             <a:fld id="{5BCAD085-E8A6-8845-BD4E-CB4CCA059FC4}" type="datetimeFigureOut">
               <a:rPr lang="en-US" smtClean="0"/>
-              <a:t>1/27/13</a:t>
+              <a:t>6/30/2026</a:t>
             </a:fld>
             <a:endParaRPr lang="en-US"/>
           </a:p>
@@ -557,10 +569,9 @@
           <a:lstStyle/>
           <a:p>
             <a:r>
-              <a:rPr lang="en-US" smtClean="0"/>
+              <a:rPr lang="en-US"/>
               <a:t>Click to edit Master title style</a:t>
             </a:r>
-            <a:endParaRPr lang="en-US"/>
           </a:p>
         </p:txBody>
       </p:sp>
@@ -586,38 +597,37 @@
           <a:p>
             <a:pPr lvl="0"/>
             <a:r>
-              <a:rPr lang="en-US" smtClean="0"/>
+              <a:rPr lang="en-US"/>
               <a:t>Click to edit Master text styles</a:t>
             </a:r>
           </a:p>
           <a:p>
             <a:pPr lvl="1"/>
             <a:r>
-              <a:rPr lang="en-US" smtClean="0"/>
+              <a:rPr lang="en-US"/>
               <a:t>Second level</a:t>
             </a:r>
           </a:p>
           <a:p>
             <a:pPr lvl="2"/>
             <a:r>
-              <a:rPr lang="en-US" smtClean="0"/>
+              <a:rPr lang="en-US"/>
               <a:t>Third level</a:t>
             </a:r>
           </a:p>
           <a:p>
             <a:pPr lvl="3"/>
             <a:r>
-              <a:rPr lang="en-US" smtClean="0"/>
+              <a:rPr lang="en-US"/>
               <a:t>Fourth level</a:t>
             </a:r>
           </a:p>
           <a:p>
             <a:pPr lvl="4"/>
             <a:r>
-              <a:rPr lang="en-US" smtClean="0"/>
+              <a:rPr lang="en-US"/>
               <a:t>Fifth level</a:t>
             </a:r>
-            <a:endParaRPr lang="en-US"/>
           </a:p>
         </p:txBody>
       </p:sp>
@@ -638,7 +648,7 @@
           <a:p>
             <a:fld id="{5BCAD085-E8A6-8845-BD4E-CB4CCA059FC4}" type="datetimeFigureOut">
               <a:rPr lang="en-US" smtClean="0"/>
-              <a:t>1/27/13</a:t>
+              <a:t>6/30/2026</a:t>
             </a:fld>
             <a:endParaRPr lang="en-US"/>
           </a:p>
@@ -732,10 +742,9 @@
           <a:lstStyle/>
           <a:p>
             <a:r>
-              <a:rPr lang="en-US" smtClean="0"/>
+              <a:rPr lang="en-US"/>
               <a:t>Click to edit Master title style</a:t>
             </a:r>
-            <a:endParaRPr lang="en-US"/>
           </a:p>
         </p:txBody>
       </p:sp>
@@ -756,38 +765,37 @@
           <a:p>
             <a:pPr lvl="0"/>
             <a:r>
-              <a:rPr lang="en-US" smtClean="0"/>
+              <a:rPr lang="en-US"/>
               <a:t>Click to edit Master text styles</a:t>
             </a:r>
           </a:p>
           <a:p>
             <a:pPr lvl="1"/>
             <a:r>
-              <a:rPr lang="en-US" smtClean="0"/>
+              <a:rPr lang="en-US"/>
               <a:t>Second level</a:t>
             </a:r>
           </a:p>
           <a:p>
             <a:pPr lvl="2"/>
             <a:r>
-              <a:rPr lang="en-US" smtClean="0"/>
+              <a:rPr lang="en-US"/>
               <a:t>Third level</a:t>
             </a:r>
           </a:p>
           <a:p>
             <a:pPr lvl="3"/>
             <a:r>
-              <a:rPr lang="en-US" smtClean="0"/>
+              <a:rPr lang="en-US"/>
               <a:t>Fourth level</a:t>
             </a:r>
           </a:p>
           <a:p>
             <a:pPr lvl="4"/>
             <a:r>
-              <a:rPr lang="en-US" smtClean="0"/>
+              <a:rPr lang="en-US"/>
               <a:t>Fifth level</a:t>
             </a:r>
-            <a:endParaRPr lang="en-US"/>
           </a:p>
         </p:txBody>
       </p:sp>
@@ -808,7 +816,7 @@
           <a:p>
             <a:fld id="{5BCAD085-E8A6-8845-BD4E-CB4CCA059FC4}" type="datetimeFigureOut">
               <a:rPr lang="en-US" smtClean="0"/>
-              <a:t>1/27/13</a:t>
+              <a:t>6/30/2026</a:t>
             </a:fld>
             <a:endParaRPr lang="en-US"/>
           </a:p>
@@ -911,10 +919,9 @@
           </a:lstStyle>
           <a:p>
             <a:r>
-              <a:rPr lang="en-US" smtClean="0"/>
+              <a:rPr lang="en-US"/>
               <a:t>Click to edit Master title style</a:t>
             </a:r>
-            <a:endParaRPr lang="en-US"/>
           </a:p>
         </p:txBody>
       </p:sp>
@@ -1031,7 +1038,7 @@
           <a:p>
             <a:pPr lvl="0"/>
             <a:r>
-              <a:rPr lang="en-US" smtClean="0"/>
+              <a:rPr lang="en-US"/>
               <a:t>Click to edit Master text styles</a:t>
             </a:r>
           </a:p>
@@ -1054,7 +1061,7 @@
           <a:p>
             <a:fld id="{5BCAD085-E8A6-8845-BD4E-CB4CCA059FC4}" type="datetimeFigureOut">
               <a:rPr lang="en-US" smtClean="0"/>
-              <a:t>1/27/13</a:t>
+              <a:t>6/30/2026</a:t>
             </a:fld>
             <a:endParaRPr lang="en-US"/>
           </a:p>
@@ -1148,10 +1155,9 @@
           <a:lstStyle/>
           <a:p>
             <a:r>
-              <a:rPr lang="en-US" smtClean="0"/>
+              <a:rPr lang="en-US"/>
               <a:t>Click to edit Master title style</a:t>
             </a:r>
-            <a:endParaRPr lang="en-US"/>
           </a:p>
         </p:txBody>
       </p:sp>
@@ -1205,38 +1211,37 @@
           <a:p>
             <a:pPr lvl="0"/>
             <a:r>
-              <a:rPr lang="en-US" smtClean="0"/>
+              <a:rPr lang="en-US"/>
               <a:t>Click to edit Master text styles</a:t>
             </a:r>
           </a:p>
           <a:p>
             <a:pPr lvl="1"/>
             <a:r>
-              <a:rPr lang="en-US" smtClean="0"/>
+              <a:rPr lang="en-US"/>
               <a:t>Second level</a:t>
             </a:r>
           </a:p>
           <a:p>
             <a:pPr lvl="2"/>
             <a:r>
-              <a:rPr lang="en-US" smtClean="0"/>
+              <a:rPr lang="en-US"/>
               <a:t>Third level</a:t>
             </a:r>
           </a:p>
           <a:p>
             <a:pPr lvl="3"/>
             <a:r>
-              <a:rPr lang="en-US" smtClean="0"/>
+              <a:rPr lang="en-US"/>
               <a:t>Fourth level</a:t>
             </a:r>
           </a:p>
           <a:p>
             <a:pPr lvl="4"/>
             <a:r>
-              <a:rPr lang="en-US" smtClean="0"/>
+              <a:rPr lang="en-US"/>
               <a:t>Fifth level</a:t>
             </a:r>
-            <a:endParaRPr lang="en-US"/>
           </a:p>
         </p:txBody>
       </p:sp>
@@ -1290,38 +1295,37 @@
           <a:p>
             <a:pPr lvl="0"/>
             <a:r>
-              <a:rPr lang="en-US" smtClean="0"/>
+              <a:rPr lang="en-US"/>
               <a:t>Click to edit Master text styles</a:t>
             </a:r>
           </a:p>
           <a:p>
             <a:pPr lvl="1"/>
             <a:r>
-              <a:rPr lang="en-US" smtClean="0"/>
+              <a:rPr lang="en-US"/>
               <a:t>Second level</a:t>
             </a:r>
           </a:p>
           <a:p>
             <a:pPr lvl="2"/>
             <a:r>
-              <a:rPr lang="en-US" smtClean="0"/>
+              <a:rPr lang="en-US"/>
               <a:t>Third level</a:t>
             </a:r>
           </a:p>
           <a:p>
             <a:pPr lvl="3"/>
             <a:r>
-              <a:rPr lang="en-US" smtClean="0"/>
+              <a:rPr lang="en-US"/>
               <a:t>Fourth level</a:t>
             </a:r>
           </a:p>
           <a:p>
             <a:pPr lvl="4"/>
             <a:r>
-              <a:rPr lang="en-US" smtClean="0"/>
+              <a:rPr lang="en-US"/>
               <a:t>Fifth level</a:t>
             </a:r>
-            <a:endParaRPr lang="en-US"/>
           </a:p>
         </p:txBody>
       </p:sp>
@@ -1342,7 +1346,7 @@
           <a:p>
             <a:fld id="{5BCAD085-E8A6-8845-BD4E-CB4CCA059FC4}" type="datetimeFigureOut">
               <a:rPr lang="en-US" smtClean="0"/>
-              <a:t>1/27/13</a:t>
+              <a:t>6/30/2026</a:t>
             </a:fld>
             <a:endParaRPr lang="en-US"/>
           </a:p>
@@ -1440,10 +1444,9 @@
           </a:lstStyle>
           <a:p>
             <a:r>
-              <a:rPr lang="en-US" smtClean="0"/>
+              <a:rPr lang="en-US"/>
               <a:t>Click to edit Master title style</a:t>
             </a:r>
-            <a:endParaRPr lang="en-US"/>
           </a:p>
         </p:txBody>
       </p:sp>
@@ -1506,7 +1509,7 @@
           <a:p>
             <a:pPr lvl="0"/>
             <a:r>
-              <a:rPr lang="en-US" smtClean="0"/>
+              <a:rPr lang="en-US"/>
               <a:t>Click to edit Master text styles</a:t>
             </a:r>
           </a:p>
@@ -1562,38 +1565,37 @@
           <a:p>
             <a:pPr lvl="0"/>
             <a:r>
-              <a:rPr lang="en-US" smtClean="0"/>
+              <a:rPr lang="en-US"/>
               <a:t>Click to edit Master text styles</a:t>
             </a:r>
           </a:p>
           <a:p>
             <a:pPr lvl="1"/>
             <a:r>
-              <a:rPr lang="en-US" smtClean="0"/>
+              <a:rPr lang="en-US"/>
               <a:t>Second level</a:t>
             </a:r>
           </a:p>
           <a:p>
             <a:pPr lvl="2"/>
             <a:r>
-              <a:rPr lang="en-US" smtClean="0"/>
+              <a:rPr lang="en-US"/>
               <a:t>Third level</a:t>
             </a:r>
           </a:p>
           <a:p>
             <a:pPr lvl="3"/>
             <a:r>
-              <a:rPr lang="en-US" smtClean="0"/>
+              <a:rPr lang="en-US"/>
               <a:t>Fourth level</a:t>
             </a:r>
           </a:p>
           <a:p>
             <a:pPr lvl="4"/>
             <a:r>
-              <a:rPr lang="en-US" smtClean="0"/>
+              <a:rPr lang="en-US"/>
               <a:t>Fifth level</a:t>
             </a:r>
-            <a:endParaRPr lang="en-US"/>
           </a:p>
         </p:txBody>
       </p:sp>
@@ -1656,7 +1658,7 @@
           <a:p>
             <a:pPr lvl="0"/>
             <a:r>
-              <a:rPr lang="en-US" smtClean="0"/>
+              <a:rPr lang="en-US"/>
               <a:t>Click to edit Master text styles</a:t>
             </a:r>
           </a:p>
@@ -1712,38 +1714,37 @@
           <a:p>
             <a:pPr lvl="0"/>
             <a:r>
-              <a:rPr lang="en-US" smtClean="0"/>
+              <a:rPr lang="en-US"/>
               <a:t>Click to edit Master text styles</a:t>
             </a:r>
           </a:p>
           <a:p>
             <a:pPr lvl="1"/>
             <a:r>
-              <a:rPr lang="en-US" smtClean="0"/>
+              <a:rPr lang="en-US"/>
               <a:t>Second level</a:t>
             </a:r>
           </a:p>
           <a:p>
             <a:pPr lvl="2"/>
             <a:r>
-              <a:rPr lang="en-US" smtClean="0"/>
+              <a:rPr lang="en-US"/>
               <a:t>Third level</a:t>
             </a:r>
           </a:p>
           <a:p>
             <a:pPr lvl="3"/>
             <a:r>
-              <a:rPr lang="en-US" smtClean="0"/>
+              <a:rPr lang="en-US"/>
               <a:t>Fourth level</a:t>
             </a:r>
           </a:p>
           <a:p>
             <a:pPr lvl="4"/>
             <a:r>
-              <a:rPr lang="en-US" smtClean="0"/>
+              <a:rPr lang="en-US"/>
               <a:t>Fifth level</a:t>
             </a:r>
-            <a:endParaRPr lang="en-US"/>
           </a:p>
         </p:txBody>
       </p:sp>
@@ -1764,7 +1765,7 @@
           <a:p>
             <a:fld id="{5BCAD085-E8A6-8845-BD4E-CB4CCA059FC4}" type="datetimeFigureOut">
               <a:rPr lang="en-US" smtClean="0"/>
-              <a:t>1/27/13</a:t>
+              <a:t>6/30/2026</a:t>
             </a:fld>
             <a:endParaRPr lang="en-US"/>
           </a:p>
@@ -1858,10 +1859,9 @@
           <a:lstStyle/>
           <a:p>
             <a:r>
-              <a:rPr lang="en-US" smtClean="0"/>
+              <a:rPr lang="en-US"/>
               <a:t>Click to edit Master title style</a:t>
             </a:r>
-            <a:endParaRPr lang="en-US"/>
           </a:p>
         </p:txBody>
       </p:sp>
@@ -1882,7 +1882,7 @@
           <a:p>
             <a:fld id="{5BCAD085-E8A6-8845-BD4E-CB4CCA059FC4}" type="datetimeFigureOut">
               <a:rPr lang="en-US" smtClean="0"/>
-              <a:t>1/27/13</a:t>
+              <a:t>6/30/2026</a:t>
             </a:fld>
             <a:endParaRPr lang="en-US"/>
           </a:p>
@@ -1977,7 +1977,7 @@
           <a:p>
             <a:fld id="{5BCAD085-E8A6-8845-BD4E-CB4CCA059FC4}" type="datetimeFigureOut">
               <a:rPr lang="en-US" smtClean="0"/>
-              <a:t>1/27/13</a:t>
+              <a:t>6/30/2026</a:t>
             </a:fld>
             <a:endParaRPr lang="en-US"/>
           </a:p>
@@ -2080,10 +2080,9 @@
           </a:lstStyle>
           <a:p>
             <a:r>
-              <a:rPr lang="en-US" smtClean="0"/>
+              <a:rPr lang="en-US"/>
               <a:t>Click to edit Master title style</a:t>
             </a:r>
-            <a:endParaRPr lang="en-US"/>
           </a:p>
         </p:txBody>
       </p:sp>
@@ -2137,38 +2136,37 @@
           <a:p>
             <a:pPr lvl="0"/>
             <a:r>
-              <a:rPr lang="en-US" smtClean="0"/>
+              <a:rPr lang="en-US"/>
               <a:t>Click to edit Master text styles</a:t>
             </a:r>
           </a:p>
           <a:p>
             <a:pPr lvl="1"/>
             <a:r>
-              <a:rPr lang="en-US" smtClean="0"/>
+              <a:rPr lang="en-US"/>
               <a:t>Second level</a:t>
             </a:r>
           </a:p>
           <a:p>
             <a:pPr lvl="2"/>
             <a:r>
-              <a:rPr lang="en-US" smtClean="0"/>
+              <a:rPr lang="en-US"/>
               <a:t>Third level</a:t>
             </a:r>
           </a:p>
           <a:p>
             <a:pPr lvl="3"/>
             <a:r>
-              <a:rPr lang="en-US" smtClean="0"/>
+              <a:rPr lang="en-US"/>
               <a:t>Fourth level</a:t>
             </a:r>
           </a:p>
           <a:p>
             <a:pPr lvl="4"/>
             <a:r>
-              <a:rPr lang="en-US" smtClean="0"/>
+              <a:rPr lang="en-US"/>
               <a:t>Fifth level</a:t>
             </a:r>
-            <a:endParaRPr lang="en-US"/>
           </a:p>
         </p:txBody>
       </p:sp>
@@ -2231,7 +2229,7 @@
           <a:p>
             <a:pPr lvl="0"/>
             <a:r>
-              <a:rPr lang="en-US" smtClean="0"/>
+              <a:rPr lang="en-US"/>
               <a:t>Click to edit Master text styles</a:t>
             </a:r>
           </a:p>
@@ -2254,7 +2252,7 @@
           <a:p>
             <a:fld id="{5BCAD085-E8A6-8845-BD4E-CB4CCA059FC4}" type="datetimeFigureOut">
               <a:rPr lang="en-US" smtClean="0"/>
-              <a:t>1/27/13</a:t>
+              <a:t>6/30/2026</a:t>
             </a:fld>
             <a:endParaRPr lang="en-US"/>
           </a:p>
@@ -2357,10 +2355,9 @@
           </a:lstStyle>
           <a:p>
             <a:r>
-              <a:rPr lang="en-US" smtClean="0"/>
+              <a:rPr lang="en-US"/>
               <a:t>Click to edit Master title style</a:t>
             </a:r>
-            <a:endParaRPr lang="en-US"/>
           </a:p>
         </p:txBody>
       </p:sp>
@@ -2484,7 +2481,7 @@
           <a:p>
             <a:pPr lvl="0"/>
             <a:r>
-              <a:rPr lang="en-US" smtClean="0"/>
+              <a:rPr lang="en-US"/>
               <a:t>Click to edit Master text styles</a:t>
             </a:r>
           </a:p>
@@ -2507,7 +2504,7 @@
           <a:p>
             <a:fld id="{5BCAD085-E8A6-8845-BD4E-CB4CCA059FC4}" type="datetimeFigureOut">
               <a:rPr lang="en-US" smtClean="0"/>
-              <a:t>1/27/13</a:t>
+              <a:t>6/30/2026</a:t>
             </a:fld>
             <a:endParaRPr lang="en-US"/>
           </a:p>
@@ -2616,10 +2613,9 @@
           <a:lstStyle/>
           <a:p>
             <a:r>
-              <a:rPr lang="en-US" smtClean="0"/>
+              <a:rPr lang="en-US"/>
               <a:t>Click to edit Master title style</a:t>
             </a:r>
-            <a:endParaRPr lang="en-US"/>
           </a:p>
         </p:txBody>
       </p:sp>
@@ -2650,38 +2646,37 @@
           <a:p>
             <a:pPr lvl="0"/>
             <a:r>
-              <a:rPr lang="en-US" smtClean="0"/>
+              <a:rPr lang="en-US"/>
               <a:t>Click to edit Master text styles</a:t>
             </a:r>
           </a:p>
           <a:p>
             <a:pPr lvl="1"/>
             <a:r>
-              <a:rPr lang="en-US" smtClean="0"/>
+              <a:rPr lang="en-US"/>
               <a:t>Second level</a:t>
             </a:r>
           </a:p>
           <a:p>
             <a:pPr lvl="2"/>
             <a:r>
-              <a:rPr lang="en-US" smtClean="0"/>
+              <a:rPr lang="en-US"/>
               <a:t>Third level</a:t>
             </a:r>
           </a:p>
           <a:p>
             <a:pPr lvl="3"/>
             <a:r>
-              <a:rPr lang="en-US" smtClean="0"/>
+              <a:rPr lang="en-US"/>
               <a:t>Fourth level</a:t>
             </a:r>
           </a:p>
           <a:p>
             <a:pPr lvl="4"/>
             <a:r>
-              <a:rPr lang="en-US" smtClean="0"/>
+              <a:rPr lang="en-US"/>
               <a:t>Fifth level</a:t>
             </a:r>
-            <a:endParaRPr lang="en-US"/>
           </a:p>
         </p:txBody>
       </p:sp>
@@ -2720,7 +2715,7 @@
           <a:p>
             <a:fld id="{5BCAD085-E8A6-8845-BD4E-CB4CCA059FC4}" type="datetimeFigureOut">
               <a:rPr lang="en-US" smtClean="0"/>
-              <a:t>1/27/13</a:t>
+              <a:t>6/30/2026</a:t>
             </a:fld>
             <a:endParaRPr lang="en-US"/>
           </a:p>
@@ -3079,7 +3074,7 @@
 </file>
 
 <file path=ppt/slides/slide1.xml><?xml version="1.0" encoding="utf-8"?>
-<p:sld xmlns:a="http://schemas.openxmlformats.org/drawingml/2006/main" xmlns:p="http://schemas.openxmlformats.org/presentationml/2006/main" xmlns:r="http://schemas.openxmlformats.org/officeDocument/2006/relationships">
+<p:sld xmlns:a="http://schemas.openxmlformats.org/drawingml/2006/main" xmlns:r="http://schemas.openxmlformats.org/officeDocument/2006/relationships" xmlns:p="http://schemas.openxmlformats.org/presentationml/2006/main">
   <p:cSld>
     <p:spTree>
       <p:nvGrpSpPr>
@@ -3087,7 +3082,14 @@
         <p:cNvGrpSpPr/>
         <p:nvPr/>
       </p:nvGrpSpPr>
-      <p:grpSpPr/>
+      <p:grpSpPr>
+        <a:xfrm>
+          <a:off x="0" y="0"/>
+          <a:ext cx="0" cy="0"/>
+          <a:chOff x="0" y="0"/>
+          <a:chExt cx="0" cy="0"/>
+        </a:xfrm>
+      </p:grpSpPr>
       <p:sp>
         <p:nvSpPr>
           <p:cNvPr id="2" name="Rectangle 1"/>
@@ -3128,6 +3130,7 @@
           <a:lstStyle/>
           <a:p>
             <a:pPr algn="ctr"/>
+            <a:endParaRPr/>
           </a:p>
         </p:txBody>
       </p:sp>
@@ -3171,6 +3174,7 @@
           <a:lstStyle/>
           <a:p>
             <a:pPr algn="ctr"/>
+            <a:endParaRPr/>
           </a:p>
         </p:txBody>
       </p:sp>
@@ -3214,6 +3218,7 @@
           <a:lstStyle/>
           <a:p>
             <a:pPr algn="ctr"/>
+            <a:endParaRPr/>
           </a:p>
         </p:txBody>
       </p:sp>
@@ -3453,6 +3458,7 @@
           <a:lstStyle/>
           <a:p>
             <a:pPr algn="ctr"/>
+            <a:endParaRPr/>
           </a:p>
         </p:txBody>
       </p:sp>
@@ -3535,6 +3541,7 @@
           <a:lstStyle/>
           <a:p>
             <a:pPr algn="ctr"/>
+            <a:endParaRPr/>
           </a:p>
         </p:txBody>
       </p:sp>
@@ -3590,14 +3597,11 @@
           </a:p>
           <a:p>
             <a:pPr algn="l"/>
-            <a:r>
-              <a:rPr sz="800" b="0">
-                <a:solidFill>
-                  <a:srgbClr val="373737"/>
-                </a:solidFill>
-              </a:rPr>
-              <a:t/>
-            </a:r>
+            <a:endParaRPr sz="2000" b="0">
+              <a:solidFill>
+                <a:srgbClr val="373737"/>
+              </a:solidFill>
+            </a:endParaRPr>
           </a:p>
           <a:p>
             <a:pPr algn="l">
@@ -3633,19 +3637,16 @@
                   <a:srgbClr val="373737"/>
                 </a:solidFill>
               </a:rPr>
-              <a:t>  •  The receiver continues to output a ‘valid’ fix with no error flag</a:t>
-            </a:r>
-          </a:p>
-          <a:p>
-            <a:pPr algn="l"/>
-            <a:r>
-              <a:rPr sz="800" b="0">
-                <a:solidFill>
-                  <a:srgbClr val="373737"/>
-                </a:solidFill>
-              </a:rPr>
-              <a:t/>
-            </a:r>
+              <a:t>  •  The receiver continues to output a 'valid' fix with no error flag</a:t>
+            </a:r>
+          </a:p>
+          <a:p>
+            <a:pPr algn="l"/>
+            <a:endParaRPr sz="2000" b="0">
+              <a:solidFill>
+                <a:srgbClr val="373737"/>
+              </a:solidFill>
+            </a:endParaRPr>
           </a:p>
           <a:p>
             <a:pPr algn="l">
@@ -3675,14 +3676,11 @@
           </a:p>
           <a:p>
             <a:pPr algn="l"/>
-            <a:r>
-              <a:rPr sz="800" b="0">
-                <a:solidFill>
-                  <a:srgbClr val="373737"/>
-                </a:solidFill>
-              </a:rPr>
-              <a:t/>
-            </a:r>
+            <a:endParaRPr sz="2000" b="0">
+              <a:solidFill>
+                <a:srgbClr val="C81E1E"/>
+              </a:solidFill>
+            </a:endParaRPr>
           </a:p>
           <a:p>
             <a:pPr algn="l"/>
@@ -3724,8 +3722,8 @@
         </p:blipFill>
         <p:spPr>
           <a:xfrm>
-            <a:off x="384048" y="6903720"/>
-            <a:ext cx="14118335" cy="4206240"/>
+            <a:off x="548640" y="6739128"/>
+            <a:ext cx="14118335" cy="3840480"/>
           </a:xfrm>
           <a:prstGeom prst="rect">
             <a:avLst/>
@@ -3740,7 +3738,7 @@
         </p:nvSpPr>
         <p:spPr>
           <a:xfrm>
-            <a:off x="475488" y="11137391"/>
+            <a:off x="475488" y="10771632"/>
             <a:ext cx="13935455" cy="420624"/>
           </a:xfrm>
           <a:prstGeom prst="rect">
@@ -3764,7 +3762,7 @@
                   <a:srgbClr val="005BAC"/>
                 </a:solidFill>
               </a:rPr>
-              <a:t>Fig. 1: Reactive monitoring gives 0 s warning. SENTINEL gives 5–30 s advance notice, enabling pre-emptive action before the worst GPS measurements arrive.</a:t>
+              <a:t>Fig. 1: Reactive monitoring gives 0 s warning. SENTINEL provides CLEAN → WARNING → DEGRADED labels 30/15/5 s before blockage, enabling pre-emptive fusion decisions.</a:t>
             </a:r>
           </a:p>
         </p:txBody>
@@ -3777,7 +3775,7 @@
         </p:nvSpPr>
         <p:spPr>
           <a:xfrm>
-            <a:off x="384048" y="11695176"/>
+            <a:off x="384048" y="11329416"/>
             <a:ext cx="14118335" cy="475488"/>
           </a:xfrm>
           <a:prstGeom prst="rect">
@@ -3809,6 +3807,7 @@
           <a:lstStyle/>
           <a:p>
             <a:pPr algn="ctr"/>
+            <a:endParaRPr/>
           </a:p>
         </p:txBody>
       </p:sp>
@@ -3820,7 +3819,7 @@
         </p:nvSpPr>
         <p:spPr>
           <a:xfrm>
-            <a:off x="512064" y="11759184"/>
+            <a:off x="512064" y="11393424"/>
             <a:ext cx="13862303" cy="411480"/>
           </a:xfrm>
           <a:prstGeom prst="rect">
@@ -3857,7 +3856,7 @@
         </p:nvSpPr>
         <p:spPr>
           <a:xfrm>
-            <a:off x="384048" y="12170663"/>
+            <a:off x="384048" y="11804904"/>
             <a:ext cx="14118335" cy="2487168"/>
           </a:xfrm>
           <a:prstGeom prst="rect">
@@ -3891,6 +3890,7 @@
           <a:lstStyle/>
           <a:p>
             <a:pPr algn="ctr"/>
+            <a:endParaRPr/>
           </a:p>
         </p:txBody>
       </p:sp>
@@ -3902,7 +3902,7 @@
         </p:nvSpPr>
         <p:spPr>
           <a:xfrm>
-            <a:off x="548640" y="12298680"/>
+            <a:off x="548640" y="11932920"/>
             <a:ext cx="13789151" cy="2231136"/>
           </a:xfrm>
           <a:prstGeom prst="rect">
@@ -3941,7 +3941,7 @@
                   <a:srgbClr val="373737"/>
                 </a:solidFill>
               </a:rPr>
-              <a:t>  •  Hangzhou (Beihang campus): 5 scenarios, Septentrio Mosaic-X5C</a:t>
+              <a:t>  •  Hangzhou (Beihang campus): Scenarios A–E, Septentrio Mosaic-X5C</a:t>
             </a:r>
           </a:p>
           <a:p>
@@ -3968,13 +3968,21 @@
           </a:p>
           <a:p>
             <a:pPr algn="l"/>
-            <a:r>
-              <a:rPr sz="800" b="0">
+            <a:endParaRPr sz="2000" b="0">
+              <a:solidFill>
+                <a:srgbClr val="373737"/>
+              </a:solidFill>
+            </a:endParaRPr>
+          </a:p>
+          <a:p>
+            <a:pPr algn="l"/>
+            <a:r>
+              <a:rPr sz="2000" b="0">
                 <a:solidFill>
                   <a:srgbClr val="373737"/>
                 </a:solidFill>
               </a:rPr>
-              <a:t/>
+              <a:t>37 features in 7 groups: position quality, signal strength, satellite geometry,</a:t>
             </a:r>
           </a:p>
           <a:p>
@@ -3985,30 +3993,16 @@
                   <a:srgbClr val="373737"/>
                 </a:solidFill>
               </a:rPr>
-              <a:t>37 features in 7 groups: position quality, signal strength, satellite geometry,</a:t>
-            </a:r>
-          </a:p>
-          <a:p>
-            <a:pPr algn="l"/>
-            <a:r>
-              <a:rPr sz="2000" b="0">
-                <a:solidFill>
-                  <a:srgbClr val="373737"/>
-                </a:solidFill>
-              </a:rPr>
-              <a:t>pseudorange, temporal patterns, atmospheric delays, receiver status.</a:t>
-            </a:r>
-          </a:p>
-          <a:p>
-            <a:pPr algn="l"/>
-            <a:r>
-              <a:rPr sz="600" b="0">
-                <a:solidFill>
-                  <a:srgbClr val="373737"/>
-                </a:solidFill>
-              </a:rPr>
-              <a:t/>
-            </a:r>
+              <a:t>pseudorange residuals, temporal patterns, atmospheric delays, receiver status.</a:t>
+            </a:r>
+          </a:p>
+          <a:p>
+            <a:pPr algn="l"/>
+            <a:endParaRPr sz="2000" b="0">
+              <a:solidFill>
+                <a:srgbClr val="373737"/>
+              </a:solidFill>
+            </a:endParaRPr>
           </a:p>
           <a:p>
             <a:pPr algn="l"/>
@@ -4018,7 +4012,7 @@
                   <a:srgbClr val="005BAC"/>
                 </a:solidFill>
               </a:rPr>
-              <a:t>Key: receiver_tier encodes hardware class so one model handles</a:t>
+              <a:t>Key: receiver_tier encodes hardware class — one model handles</a:t>
             </a:r>
           </a:p>
           <a:p>
@@ -4029,7 +4023,7 @@
                   <a:srgbClr val="005BAC"/>
                 </a:solidFill>
               </a:rPr>
-              <a:t>Septentrio (48 dB-Hz baseline) and u-blox (38 dB-Hz) correctly.</a:t>
+              <a:t>Septentrio (48 dB-Hz baseline) and u-blox (38 dB-Hz) identically.</a:t>
             </a:r>
           </a:p>
         </p:txBody>
@@ -4050,8 +4044,8 @@
         </p:blipFill>
         <p:spPr>
           <a:xfrm>
-            <a:off x="384048" y="14776703"/>
-            <a:ext cx="14118335" cy="3383280"/>
+            <a:off x="384048" y="14410944"/>
+            <a:ext cx="14118335" cy="3200400"/>
           </a:xfrm>
           <a:prstGeom prst="rect">
             <a:avLst/>
@@ -4066,7 +4060,7 @@
         </p:nvSpPr>
         <p:spPr>
           <a:xfrm>
-            <a:off x="475488" y="18187415"/>
+            <a:off x="475488" y="17638776"/>
             <a:ext cx="13935455" cy="420624"/>
           </a:xfrm>
           <a:prstGeom prst="rect">
@@ -4090,7 +4084,7 @@
                   <a:srgbClr val="005BAC"/>
                 </a:solidFill>
               </a:rPr>
-              <a:t>Fig. 2: Dataset composition across cities and receiver types. Tokyo is strictly held-out for cross-city evaluation.</a:t>
+              <a:t>Fig. 2: Dataset composition. Tokyo (49,868 epochs) is strictly held-out — never seen during training or validation.</a:t>
             </a:r>
           </a:p>
         </p:txBody>
@@ -4103,7 +4097,7 @@
         </p:nvSpPr>
         <p:spPr>
           <a:xfrm>
-            <a:off x="384048" y="18745199"/>
+            <a:off x="384048" y="18196560"/>
             <a:ext cx="14118335" cy="475488"/>
           </a:xfrm>
           <a:prstGeom prst="rect">
@@ -4135,6 +4129,7 @@
           <a:lstStyle/>
           <a:p>
             <a:pPr algn="ctr"/>
+            <a:endParaRPr/>
           </a:p>
         </p:txBody>
       </p:sp>
@@ -4146,7 +4141,7 @@
         </p:nvSpPr>
         <p:spPr>
           <a:xfrm>
-            <a:off x="512064" y="18809207"/>
+            <a:off x="512064" y="18260568"/>
             <a:ext cx="13862303" cy="411480"/>
           </a:xfrm>
           <a:prstGeom prst="rect">
@@ -4170,14 +4165,14 @@
                   <a:srgbClr val="FFFFFF"/>
                 </a:solidFill>
               </a:rPr>
-              <a:t>End-to-End System Pipeline</a:t>
+              <a:t>Classification Performance — All Horizons</a:t>
             </a:r>
           </a:p>
         </p:txBody>
       </p:sp>
       <p:pic>
         <p:nvPicPr>
-          <p:cNvPr id="25" name="Picture 24" descr="system_pipeline.png"/>
+          <p:cNvPr id="25" name="Picture 24" descr="fig13b_confusion_matrices.png"/>
           <p:cNvPicPr>
             <a:picLocks noChangeAspect="1"/>
           </p:cNvPicPr>
@@ -4191,8 +4186,8 @@
         </p:blipFill>
         <p:spPr>
           <a:xfrm>
-            <a:off x="384048" y="19220687"/>
-            <a:ext cx="14118335" cy="12710160"/>
+            <a:off x="1371600" y="19272350"/>
+            <a:ext cx="10347282" cy="9717332"/>
           </a:xfrm>
           <a:prstGeom prst="rect">
             <a:avLst/>
@@ -4231,7 +4226,7 @@
                   <a:srgbClr val="005BAC"/>
                 </a:solidFill>
               </a:rPr>
-              <a:t>Fig. 3: SENTINEL wires the degradation forecast into the EKF measurement noise R, producing accurate trajectories during NLOS windows.</a:t>
+              <a:t>Fig. 3: Row-normalised confusion matrices (+5 s / +15 s / +30 s). CLEAN recall ≥ 0.97 at all horizons; DEGRADED recall 0.85 → 0.73 as horizon extends.</a:t>
             </a:r>
           </a:p>
         </p:txBody>
@@ -4276,6 +4271,7 @@
           <a:lstStyle/>
           <a:p>
             <a:pPr algn="ctr"/>
+            <a:endParaRPr/>
           </a:p>
         </p:txBody>
       </p:sp>
@@ -4311,7 +4307,7 @@
                   <a:srgbClr val="FFFFFF"/>
                 </a:solidFill>
               </a:rPr>
-              <a:t>SENTINEL-GNSS Architecture</a:t>
+              <a:t>SENTINEL-GNSS Architecture &amp; Pipeline</a:t>
             </a:r>
           </a:p>
         </p:txBody>
@@ -4325,7 +4321,7 @@
         <p:spPr>
           <a:xfrm>
             <a:off x="14886431" y="3950208"/>
-            <a:ext cx="14118335" cy="2423160"/>
+            <a:ext cx="14118335" cy="2487168"/>
           </a:xfrm>
           <a:prstGeom prst="rect">
             <a:avLst/>
@@ -4358,6 +4354,7 @@
           <a:lstStyle/>
           <a:p>
             <a:pPr algn="ctr"/>
+            <a:endParaRPr/>
           </a:p>
         </p:txBody>
       </p:sp>
@@ -4370,7 +4367,7 @@
         <p:spPr>
           <a:xfrm>
             <a:off x="15051023" y="4078224"/>
-            <a:ext cx="13789151" cy="2167128"/>
+            <a:ext cx="13789151" cy="2231136"/>
           </a:xfrm>
           <a:prstGeom prst="rect">
             <a:avLst/>
@@ -4398,14 +4395,11 @@
           </a:p>
           <a:p>
             <a:pPr algn="l"/>
-            <a:r>
-              <a:rPr sz="600" b="0">
-                <a:solidFill>
-                  <a:srgbClr val="373737"/>
-                </a:solidFill>
-              </a:rPr>
-              <a:t/>
-            </a:r>
+            <a:endParaRPr sz="2100" b="1">
+              <a:solidFill>
+                <a:srgbClr val="003366"/>
+              </a:solidFill>
+            </a:endParaRPr>
           </a:p>
           <a:p>
             <a:pPr algn="l">
@@ -4446,14 +4440,11 @@
           </a:p>
           <a:p>
             <a:pPr algn="l"/>
-            <a:r>
-              <a:rPr sz="600" b="0">
-                <a:solidFill>
-                  <a:srgbClr val="373737"/>
-                </a:solidFill>
-              </a:rPr>
-              <a:t/>
-            </a:r>
+            <a:endParaRPr sz="2000" b="0">
+              <a:solidFill>
+                <a:srgbClr val="373737"/>
+              </a:solidFill>
+            </a:endParaRPr>
           </a:p>
           <a:p>
             <a:pPr algn="l">
@@ -4478,7 +4469,7 @@
                   <a:srgbClr val="373737"/>
                 </a:solidFill>
               </a:rPr>
-              <a:t>  2 stacked layers · hidden=256 · Reads the directional approach</a:t>
+              <a:t>  2 stacked layers · hidden=256 · detects directional approach to blockage:</a:t>
             </a:r>
           </a:p>
           <a:p>
@@ -4489,19 +4480,16 @@
                   <a:srgbClr val="373737"/>
                 </a:solidFill>
               </a:rPr>
-              <a:t>  to blockage: C/N₀ gradually declining, pseudorange residuals growing.</a:t>
-            </a:r>
-          </a:p>
-          <a:p>
-            <a:pPr algn="l"/>
-            <a:r>
-              <a:rPr sz="600" b="0">
-                <a:solidFill>
-                  <a:srgbClr val="373737"/>
-                </a:solidFill>
-              </a:rPr>
-              <a:t/>
-            </a:r>
+              <a:t>  C/N₀ declining, pseudorange residuals growing, PDOP rising.</a:t>
+            </a:r>
+          </a:p>
+          <a:p>
+            <a:pPr algn="l"/>
+            <a:endParaRPr sz="2000" b="0">
+              <a:solidFill>
+                <a:srgbClr val="373737"/>
+              </a:solidFill>
+            </a:endParaRPr>
           </a:p>
           <a:p>
             <a:pPr algn="l"/>
@@ -4511,14 +4499,14 @@
                   <a:srgbClr val="148C1E"/>
                 </a:solidFill>
               </a:rPr>
-              <a:t>Three output heads: +5 s, +15 s, +30 s  |  1.46 M parameters  |  0.039 ms/sample</a:t>
+              <a:t>Three output heads: +5 s · +15 s · +30 s  |  1.46 M params  |  0.039 ms/sample</a:t>
             </a:r>
           </a:p>
         </p:txBody>
       </p:sp>
       <p:pic>
         <p:nvPicPr>
-          <p:cNvPr id="31" name="Picture 30" descr="sentinel_gnss_inside.png"/>
+          <p:cNvPr id="31" name="Picture 30" descr="fig14_architecture.png"/>
           <p:cNvPicPr>
             <a:picLocks noChangeAspect="1"/>
           </p:cNvPicPr>
@@ -4532,8 +4520,8 @@
         </p:blipFill>
         <p:spPr>
           <a:xfrm>
-            <a:off x="14886431" y="6492240"/>
-            <a:ext cx="14118335" cy="4846320"/>
+            <a:off x="14886431" y="6556248"/>
+            <a:ext cx="14118335" cy="2560320"/>
           </a:xfrm>
           <a:prstGeom prst="rect">
             <a:avLst/>
@@ -4548,7 +4536,7 @@
         </p:nvSpPr>
         <p:spPr>
           <a:xfrm>
-            <a:off x="14977872" y="11365992"/>
+            <a:off x="14977872" y="9144000"/>
             <a:ext cx="13935455" cy="420624"/>
           </a:xfrm>
           <a:prstGeom prst="rect">
@@ -4572,7 +4560,7 @@
                   <a:srgbClr val="005BAC"/>
                 </a:solidFill>
               </a:rPr>
-              <a:t>Fig. 4: SENTINEL architecture. Transformer reads global satellite patterns; LSTM reads the directional approach to degradation events.</a:t>
+              <a:t>Fig. 4: End-to-end SENTINEL-GNSS pipeline — raw GNSS signals to multi-horizon AV planner inputs via Transformer-LSTM.</a:t>
             </a:r>
           </a:p>
         </p:txBody>
@@ -4585,7 +4573,7 @@
         </p:nvSpPr>
         <p:spPr>
           <a:xfrm>
-            <a:off x="14886431" y="11923776"/>
+            <a:off x="14886431" y="9701784"/>
             <a:ext cx="14118335" cy="475488"/>
           </a:xfrm>
           <a:prstGeom prst="rect">
@@ -4617,6 +4605,7 @@
           <a:lstStyle/>
           <a:p>
             <a:pPr algn="ctr"/>
+            <a:endParaRPr/>
           </a:p>
         </p:txBody>
       </p:sp>
@@ -4628,7 +4617,7 @@
         </p:nvSpPr>
         <p:spPr>
           <a:xfrm>
-            <a:off x="15014447" y="11987784"/>
+            <a:off x="15014447" y="9765792"/>
             <a:ext cx="13862303" cy="411480"/>
           </a:xfrm>
           <a:prstGeom prst="rect">
@@ -4665,8 +4654,8 @@
         </p:nvSpPr>
         <p:spPr>
           <a:xfrm>
-            <a:off x="14886431" y="12399264"/>
-            <a:ext cx="14118335" cy="2084831"/>
+            <a:off x="14886431" y="10177272"/>
+            <a:ext cx="14118335" cy="1975104"/>
           </a:xfrm>
           <a:prstGeom prst="rect">
             <a:avLst/>
@@ -4699,6 +4688,7 @@
           <a:lstStyle/>
           <a:p>
             <a:pPr algn="ctr"/>
+            <a:endParaRPr/>
           </a:p>
         </p:txBody>
       </p:sp>
@@ -4710,8 +4700,8 @@
         </p:nvSpPr>
         <p:spPr>
           <a:xfrm>
-            <a:off x="15051023" y="12527280"/>
-            <a:ext cx="13789151" cy="1828799"/>
+            <a:off x="15051023" y="10305288"/>
+            <a:ext cx="13789151" cy="1719072"/>
           </a:xfrm>
           <a:prstGeom prst="rect">
             <a:avLst/>
@@ -4739,14 +4729,11 @@
           </a:p>
           <a:p>
             <a:pPr algn="l"/>
-            <a:r>
-              <a:rPr sz="600" b="0">
-                <a:solidFill>
-                  <a:srgbClr val="373737"/>
-                </a:solidFill>
-              </a:rPr>
-              <a:t/>
-            </a:r>
+            <a:endParaRPr sz="2000" b="0">
+              <a:solidFill>
+                <a:srgbClr val="373737"/>
+              </a:solidFill>
+            </a:endParaRPr>
           </a:p>
           <a:p>
             <a:pPr algn="l">
@@ -4771,7 +4758,7 @@
                   <a:srgbClr val="373737"/>
                 </a:solidFill>
               </a:rPr>
-              <a:t>  +15 s:  Macro-F1 = 0.741  |  DEGRADED F1 = 0.68</a:t>
+              <a:t>  +15 s:  Macro-F1 = 0.741  |  DEGRADED F1 = 0.583</a:t>
             </a:r>
           </a:p>
           <a:p>
@@ -4782,18 +4769,26 @@
                   <a:srgbClr val="373737"/>
                 </a:solidFill>
               </a:rPr>
-              <a:t>  +30 s:  Macro-F1 = 0.783  |  DEGRADED F1 = 0.71</a:t>
-            </a:r>
-          </a:p>
-          <a:p>
-            <a:pPr algn="l"/>
-            <a:r>
-              <a:rPr sz="600" b="0">
+              <a:t>  +30 s:  Macro-F1 = 0.783  |  DEGRADED F1 = 0.629</a:t>
+            </a:r>
+          </a:p>
+          <a:p>
+            <a:pPr algn="l"/>
+            <a:endParaRPr sz="2000" b="0">
+              <a:solidFill>
+                <a:srgbClr val="373737"/>
+              </a:solidFill>
+            </a:endParaRPr>
+          </a:p>
+          <a:p>
+            <a:pPr algn="l"/>
+            <a:r>
+              <a:rPr sz="2000" b="0">
                 <a:solidFill>
                   <a:srgbClr val="373737"/>
                 </a:solidFill>
               </a:rPr>
-              <a:t/>
+              <a:t>84.7% of approaching degradation events flagged at +5 s — before</a:t>
             </a:r>
           </a:p>
           <a:p>
@@ -4804,18 +4799,7 @@
                   <a:srgbClr val="373737"/>
                 </a:solidFill>
               </a:rPr>
-              <a:t>High DEGRADED recall at +5 s means 84.7% of all approaching degradation</a:t>
-            </a:r>
-          </a:p>
-          <a:p>
-            <a:pPr algn="l"/>
-            <a:r>
-              <a:rPr sz="2000" b="0">
-                <a:solidFill>
-                  <a:srgbClr val="373737"/>
-                </a:solidFill>
-              </a:rPr>
-              <a:t>events are flagged before they arrive — the safety-critical metric for AVs.</a:t>
+              <a:t>biased measurements arrive. MCC = 0.773 (strong class balance).</a:t>
             </a:r>
           </a:p>
         </p:txBody>
@@ -4836,8 +4820,8 @@
         </p:blipFill>
         <p:spPr>
           <a:xfrm>
-            <a:off x="14886431" y="14602968"/>
-            <a:ext cx="14118335" cy="3749039"/>
+            <a:off x="14886431" y="12271248"/>
+            <a:ext cx="14118335" cy="3657600"/>
           </a:xfrm>
           <a:prstGeom prst="rect">
             <a:avLst/>
@@ -4852,7 +4836,7 @@
         </p:nvSpPr>
         <p:spPr>
           <a:xfrm>
-            <a:off x="14977872" y="18379440"/>
+            <a:off x="14977872" y="15956280"/>
             <a:ext cx="13935455" cy="420624"/>
           </a:xfrm>
           <a:prstGeom prst="rect">
@@ -4876,7 +4860,7 @@
                   <a:srgbClr val="005BAC"/>
                 </a:solidFill>
               </a:rPr>
-              <a:t>Fig. 5: Per-class F1 at all three prediction horizons. +5 s achieves the strongest DEGRADED-class detection.</a:t>
+              <a:t>Fig. 5: Macro-F1 and MCC across prediction horizons with bootstrap 95% CI. Performance degrades gracefully as horizon extends.</a:t>
             </a:r>
           </a:p>
         </p:txBody>
@@ -4889,7 +4873,7 @@
         </p:nvSpPr>
         <p:spPr>
           <a:xfrm>
-            <a:off x="14886431" y="18937224"/>
+            <a:off x="14886431" y="16514064"/>
             <a:ext cx="14118335" cy="475488"/>
           </a:xfrm>
           <a:prstGeom prst="rect">
@@ -4921,6 +4905,7 @@
           <a:lstStyle/>
           <a:p>
             <a:pPr algn="ctr"/>
+            <a:endParaRPr/>
           </a:p>
         </p:txBody>
       </p:sp>
@@ -4932,7 +4917,7 @@
         </p:nvSpPr>
         <p:spPr>
           <a:xfrm>
-            <a:off x="15014447" y="19001232"/>
+            <a:off x="15014447" y="16578072"/>
             <a:ext cx="13862303" cy="411480"/>
           </a:xfrm>
           <a:prstGeom prst="rect">
@@ -4969,8 +4954,8 @@
         </p:nvSpPr>
         <p:spPr>
           <a:xfrm>
-            <a:off x="14886431" y="19412712"/>
-            <a:ext cx="14118335" cy="1901952"/>
+            <a:off x="14886431" y="16989552"/>
+            <a:ext cx="14118335" cy="1828800"/>
           </a:xfrm>
           <a:prstGeom prst="rect">
             <a:avLst/>
@@ -5003,6 +4988,7 @@
           <a:lstStyle/>
           <a:p>
             <a:pPr algn="ctr"/>
+            <a:endParaRPr/>
           </a:p>
         </p:txBody>
       </p:sp>
@@ -5014,8 +5000,8 @@
         </p:nvSpPr>
         <p:spPr>
           <a:xfrm>
-            <a:off x="15051023" y="19540728"/>
-            <a:ext cx="13789151" cy="1645920"/>
+            <a:off x="15051023" y="17117568"/>
+            <a:ext cx="13789151" cy="1572768"/>
           </a:xfrm>
           <a:prstGeom prst="rect">
             <a:avLst/>
@@ -5076,24 +5062,21 @@
           </a:p>
           <a:p>
             <a:pPr algn="l"/>
-            <a:r>
-              <a:rPr sz="600" b="0">
+            <a:endParaRPr sz="2000" b="1">
+              <a:solidFill>
+                <a:srgbClr val="148C1E"/>
+              </a:solidFill>
+            </a:endParaRPr>
+          </a:p>
+          <a:p>
+            <a:pPr algn="l"/>
+            <a:r>
+              <a:rPr sz="1900" b="0">
                 <a:solidFill>
                   <a:srgbClr val="373737"/>
                 </a:solidFill>
               </a:rPr>
-              <a:t/>
-            </a:r>
-          </a:p>
-          <a:p>
-            <a:pPr algn="l"/>
-            <a:r>
-              <a:rPr sz="1900" b="0">
-                <a:solidFill>
-                  <a:srgbClr val="373737"/>
-                </a:solidFill>
-              </a:rPr>
-              <a:t>Removing receiver_tier: DEG-F1 drops 0.718→0.656 (largest single feature effect).</a:t>
+              <a:t>Removing receiver_tier: DEG-F1 drops 0.718 → 0.656 (largest single feature).</a:t>
             </a:r>
           </a:p>
           <a:p>
@@ -5125,8 +5108,8 @@
         </p:blipFill>
         <p:spPr>
           <a:xfrm>
-            <a:off x="14886431" y="21433536"/>
-            <a:ext cx="14118335" cy="3657600"/>
+            <a:off x="14886431" y="18937224"/>
+            <a:ext cx="14118335" cy="12993624"/>
           </a:xfrm>
           <a:prstGeom prst="rect">
             <a:avLst/>
@@ -5141,7 +5124,7 @@
         </p:nvSpPr>
         <p:spPr>
           <a:xfrm>
-            <a:off x="14977872" y="25118568"/>
+            <a:off x="14977872" y="31958280"/>
             <a:ext cx="13935455" cy="420624"/>
           </a:xfrm>
           <a:prstGeom prst="rect">
@@ -5165,7 +5148,7 @@
                   <a:srgbClr val="005BAC"/>
                 </a:solidFill>
               </a:rPr>
-              <a:t>Fig. 6: Ablation: Macro-F1, MCC, and DEGRADED-F1 for each architecture variant. Each component contributes independently.</a:t>
+              <a:t>Fig. 6: Ablation across architecture variants. Macro-F1, MCC, and DEGRADED-F1 — each component independently contributes to performance.</a:t>
             </a:r>
           </a:p>
         </p:txBody>
@@ -5178,7 +5161,7 @@
         </p:nvSpPr>
         <p:spPr>
           <a:xfrm>
-            <a:off x="14886431" y="25676352"/>
+            <a:off x="29388815" y="3474720"/>
             <a:ext cx="14118335" cy="475488"/>
           </a:xfrm>
           <a:prstGeom prst="rect">
@@ -5210,6 +5193,7 @@
           <a:lstStyle/>
           <a:p>
             <a:pPr algn="ctr"/>
+            <a:endParaRPr/>
           </a:p>
         </p:txBody>
       </p:sp>
@@ -5221,7 +5205,7 @@
         </p:nvSpPr>
         <p:spPr>
           <a:xfrm>
-            <a:off x="15014447" y="25740360"/>
+            <a:off x="29516831" y="3538727"/>
             <a:ext cx="13862303" cy="411480"/>
           </a:xfrm>
           <a:prstGeom prst="rect">
@@ -5245,91 +5229,32 @@
                   <a:srgbClr val="FFFFFF"/>
                 </a:solidFill>
               </a:rPr>
-              <a:t>Full Model Comparison</a:t>
-            </a:r>
-          </a:p>
-        </p:txBody>
-      </p:sp>
-      <p:pic>
-        <p:nvPicPr>
-          <p:cNvPr id="47" name="Picture 46" descr="fig03_model_comparison.png"/>
-          <p:cNvPicPr>
-            <a:picLocks noChangeAspect="1"/>
-          </p:cNvPicPr>
-          <p:nvPr/>
-        </p:nvPicPr>
-        <p:blipFill>
-          <a:blip r:embed="rId10"/>
-          <a:stretch>
-            <a:fillRect/>
-          </a:stretch>
-        </p:blipFill>
-        <p:spPr>
-          <a:xfrm>
-            <a:off x="14886431" y="26151840"/>
-            <a:ext cx="14118335" cy="5779008"/>
-          </a:xfrm>
-          <a:prstGeom prst="rect">
-            <a:avLst/>
-          </a:prstGeom>
-        </p:spPr>
-      </p:pic>
-      <p:sp>
-        <p:nvSpPr>
-          <p:cNvPr id="48" name="TextBox 47"/>
-          <p:cNvSpPr txBox="1"/>
-          <p:nvPr/>
-        </p:nvSpPr>
-        <p:spPr>
-          <a:xfrm>
-            <a:off x="14977872" y="31958280"/>
-            <a:ext cx="13935455" cy="420624"/>
-          </a:xfrm>
-          <a:prstGeom prst="rect">
-            <a:avLst/>
-          </a:prstGeom>
-          <a:noFill/>
-          <a:ln>
-            <a:noFill/>
-          </a:ln>
-        </p:spPr>
-        <p:txBody>
-          <a:bodyPr wrap="square">
-            <a:spAutoFit/>
-          </a:bodyPr>
-          <a:lstStyle/>
-          <a:p>
-            <a:pPr algn="l"/>
-            <a:r>
-              <a:rPr sz="1700" b="0" i="1">
-                <a:solidFill>
-                  <a:srgbClr val="005BAC"/>
-                </a:solidFill>
-              </a:rPr>
-              <a:t>Fig. 7: In-domain, tree models beat SENTINEL. In Tokyo (cross-city), only SENTINEL generalises — the deployment-relevant metric.</a:t>
-            </a:r>
-          </a:p>
-        </p:txBody>
-      </p:sp>
-      <p:sp>
-        <p:nvSpPr>
-          <p:cNvPr id="49" name="Rectangle 48"/>
+              <a:t>★  Cross-City Generalisation  —  Key Result</a:t>
+            </a:r>
+          </a:p>
+        </p:txBody>
+      </p:sp>
+      <p:sp>
+        <p:nvSpPr>
+          <p:cNvPr id="47" name="Rectangle 46"/>
           <p:cNvSpPr/>
           <p:nvPr/>
         </p:nvSpPr>
         <p:spPr>
           <a:xfrm>
-            <a:off x="29388815" y="3474720"/>
-            <a:ext cx="14118335" cy="475488"/>
+            <a:off x="29388815" y="3950208"/>
+            <a:ext cx="14118335" cy="2706624"/>
           </a:xfrm>
           <a:prstGeom prst="rect">
             <a:avLst/>
           </a:prstGeom>
           <a:solidFill>
-            <a:srgbClr val="003366"/>
+            <a:srgbClr val="EBF4FC"/>
           </a:solidFill>
-          <a:ln>
-            <a:noFill/>
+          <a:ln w="19050">
+            <a:solidFill>
+              <a:srgbClr val="005BAC"/>
+            </a:solidFill>
           </a:ln>
         </p:spPr>
         <p:style>
@@ -5351,19 +5276,20 @@
           <a:lstStyle/>
           <a:p>
             <a:pPr algn="ctr"/>
-          </a:p>
-        </p:txBody>
-      </p:sp>
-      <p:sp>
-        <p:nvSpPr>
-          <p:cNvPr id="50" name="TextBox 49"/>
+            <a:endParaRPr/>
+          </a:p>
+        </p:txBody>
+      </p:sp>
+      <p:sp>
+        <p:nvSpPr>
+          <p:cNvPr id="48" name="TextBox 47"/>
           <p:cNvSpPr txBox="1"/>
           <p:nvPr/>
         </p:nvSpPr>
         <p:spPr>
           <a:xfrm>
-            <a:off x="29516831" y="3538727"/>
-            <a:ext cx="13862303" cy="411480"/>
+            <a:off x="29553407" y="4078224"/>
+            <a:ext cx="13789151" cy="2450591"/>
           </a:xfrm>
           <a:prstGeom prst="rect">
             <a:avLst/>
@@ -5381,12 +5307,170 @@
           <a:p>
             <a:pPr algn="l"/>
             <a:r>
-              <a:rPr sz="2600" b="1" i="0">
-                <a:solidFill>
-                  <a:srgbClr val="FFFFFF"/>
-                </a:solidFill>
-              </a:rPr>
-              <a:t>★  Cross-City Generalisation  —  Key Result</a:t>
+              <a:rPr sz="2000" b="0">
+                <a:solidFill>
+                  <a:srgbClr val="373737"/>
+                </a:solidFill>
+              </a:rPr>
+              <a:t>Training: Hangzhou + Hong Kong   |   Test: Tokyo (never seen during training)</a:t>
+            </a:r>
+          </a:p>
+          <a:p>
+            <a:pPr algn="l"/>
+            <a:endParaRPr sz="2000" b="0">
+              <a:solidFill>
+                <a:srgbClr val="373737"/>
+              </a:solidFill>
+            </a:endParaRPr>
+          </a:p>
+          <a:p>
+            <a:pPr algn="l">
+              <a:spcBef>
+                <a:spcPts val="400"/>
+              </a:spcBef>
+            </a:pPr>
+            <a:r>
+              <a:rPr sz="2200" b="1">
+                <a:solidFill>
+                  <a:srgbClr val="003366"/>
+                </a:solidFill>
+              </a:rPr>
+              <a:t>Tokyo DEGRADED-class F1 at +5 s:</a:t>
+            </a:r>
+          </a:p>
+          <a:p>
+            <a:pPr algn="l"/>
+            <a:r>
+              <a:rPr sz="2300" b="1">
+                <a:solidFill>
+                  <a:srgbClr val="148C1E"/>
+                </a:solidFill>
+              </a:rPr>
+              <a:t>  SENTINEL (DL):    0.75   ✔  Learns transferable temporal patterns</a:t>
+            </a:r>
+          </a:p>
+          <a:p>
+            <a:pPr algn="l"/>
+            <a:r>
+              <a:rPr sz="2300" b="1">
+                <a:solidFill>
+                  <a:srgbClr val="C81E1E"/>
+                </a:solidFill>
+              </a:rPr>
+              <a:t>  Random Forest:    0.15   ✘  Memorises city-specific feature thresholds</a:t>
+            </a:r>
+          </a:p>
+          <a:p>
+            <a:pPr algn="l"/>
+            <a:endParaRPr sz="2300" b="1">
+              <a:solidFill>
+                <a:srgbClr val="C81E1E"/>
+              </a:solidFill>
+            </a:endParaRPr>
+          </a:p>
+          <a:p>
+            <a:pPr algn="l"/>
+            <a:r>
+              <a:rPr sz="2000" b="0">
+                <a:solidFill>
+                  <a:srgbClr val="373737"/>
+                </a:solidFill>
+              </a:rPr>
+              <a:t>Why RF fails: RF learned PDOP &gt; 3.1 → DEGRADED from Beihang data.</a:t>
+            </a:r>
+          </a:p>
+          <a:p>
+            <a:pPr algn="l"/>
+            <a:r>
+              <a:rPr sz="2000" b="0">
+                <a:solidFill>
+                  <a:srgbClr val="373737"/>
+                </a:solidFill>
+              </a:rPr>
+              <a:t>In Tokyo the PDOP baseline is 2.8 (taller buildings, different geometry).</a:t>
+            </a:r>
+          </a:p>
+          <a:p>
+            <a:pPr algn="l"/>
+            <a:r>
+              <a:rPr sz="2000" b="0">
+                <a:solidFill>
+                  <a:srgbClr val="373737"/>
+                </a:solidFill>
+              </a:rPr>
+              <a:t>SENTINEL detects the temporal signature (C/N₀ declining, residuals growing),</a:t>
+            </a:r>
+          </a:p>
+          <a:p>
+            <a:pPr algn="l"/>
+            <a:r>
+              <a:rPr sz="2000" b="0">
+                <a:solidFill>
+                  <a:srgbClr val="373737"/>
+                </a:solidFill>
+              </a:rPr>
+              <a:t>which is physically consistent across cities — independent of geometry.</a:t>
+            </a:r>
+          </a:p>
+        </p:txBody>
+      </p:sp>
+      <p:pic>
+        <p:nvPicPr>
+          <p:cNvPr id="49" name="Picture 48" descr="fig05_crosscity_degraded.png"/>
+          <p:cNvPicPr>
+            <a:picLocks noChangeAspect="1"/>
+          </p:cNvPicPr>
+          <p:nvPr/>
+        </p:nvPicPr>
+        <p:blipFill>
+          <a:blip r:embed="rId10"/>
+          <a:stretch>
+            <a:fillRect/>
+          </a:stretch>
+        </p:blipFill>
+        <p:spPr>
+          <a:xfrm>
+            <a:off x="29388815" y="6775704"/>
+            <a:ext cx="14118335" cy="3566160"/>
+          </a:xfrm>
+          <a:prstGeom prst="rect">
+            <a:avLst/>
+          </a:prstGeom>
+        </p:spPr>
+      </p:pic>
+      <p:sp>
+        <p:nvSpPr>
+          <p:cNvPr id="50" name="TextBox 49"/>
+          <p:cNvSpPr txBox="1"/>
+          <p:nvPr/>
+        </p:nvSpPr>
+        <p:spPr>
+          <a:xfrm>
+            <a:off x="29480255" y="10369296"/>
+            <a:ext cx="13935455" cy="420624"/>
+          </a:xfrm>
+          <a:prstGeom prst="rect">
+            <a:avLst/>
+          </a:prstGeom>
+          <a:noFill/>
+          <a:ln>
+            <a:noFill/>
+          </a:ln>
+        </p:spPr>
+        <p:txBody>
+          <a:bodyPr wrap="square">
+            <a:spAutoFit/>
+          </a:bodyPr>
+          <a:lstStyle/>
+          <a:p>
+            <a:pPr algn="l"/>
+            <a:r>
+              <a:rPr sz="1700" b="0" i="1">
+                <a:solidFill>
+                  <a:srgbClr val="005BAC"/>
+                </a:solidFill>
+              </a:rPr>
+              <a:t>Fig. 7: Cross-city DEGRADED-class F1 at +5 s. SENTINEL 0.75 vs RF 0.15 — a 5× generalisation gap that only grows at +15 s and +30 s.</a:t>
             </a:r>
           </a:p>
         </p:txBody>
@@ -5399,19 +5483,17 @@
         </p:nvSpPr>
         <p:spPr>
           <a:xfrm>
-            <a:off x="29388815" y="3950208"/>
-            <a:ext cx="14118335" cy="2926080"/>
+            <a:off x="29388815" y="10927080"/>
+            <a:ext cx="14118335" cy="475488"/>
           </a:xfrm>
           <a:prstGeom prst="rect">
             <a:avLst/>
           </a:prstGeom>
           <a:solidFill>
-            <a:srgbClr val="EBF4FC"/>
+            <a:srgbClr val="003366"/>
           </a:solidFill>
-          <a:ln w="19050">
-            <a:solidFill>
-              <a:srgbClr val="005BAC"/>
-            </a:solidFill>
+          <a:ln>
+            <a:noFill/>
           </a:ln>
         </p:spPr>
         <p:style>
@@ -5433,6 +5515,7 @@
           <a:lstStyle/>
           <a:p>
             <a:pPr algn="ctr"/>
+            <a:endParaRPr/>
           </a:p>
         </p:txBody>
       </p:sp>
@@ -5444,8 +5527,8 @@
         </p:nvSpPr>
         <p:spPr>
           <a:xfrm>
-            <a:off x="29553407" y="4078224"/>
-            <a:ext cx="13789151" cy="2670048"/>
+            <a:off x="29516831" y="10991088"/>
+            <a:ext cx="13862303" cy="411480"/>
           </a:xfrm>
           <a:prstGeom prst="rect">
             <a:avLst/>
@@ -5463,221 +5546,37 @@
           <a:p>
             <a:pPr algn="l"/>
             <a:r>
-              <a:rPr sz="2000" b="0">
-                <a:solidFill>
-                  <a:srgbClr val="373737"/>
-                </a:solidFill>
-              </a:rPr>
-              <a:t>Training: Hangzhou + Hong Kong   |   Test: Tokyo (never seen during training)</a:t>
-            </a:r>
-          </a:p>
-          <a:p>
-            <a:pPr algn="l"/>
-            <a:r>
-              <a:rPr sz="600" b="0">
-                <a:solidFill>
-                  <a:srgbClr val="373737"/>
-                </a:solidFill>
-              </a:rPr>
-              <a:t/>
-            </a:r>
-          </a:p>
-          <a:p>
-            <a:pPr algn="l">
-              <a:spcBef>
-                <a:spcPts val="400"/>
-              </a:spcBef>
-            </a:pPr>
-            <a:r>
-              <a:rPr sz="2200" b="1">
-                <a:solidFill>
-                  <a:srgbClr val="003366"/>
-                </a:solidFill>
-              </a:rPr>
-              <a:t>Tokyo DEGRADED-class F1 at +5 s:</a:t>
-            </a:r>
-          </a:p>
-          <a:p>
-            <a:pPr algn="l"/>
-            <a:r>
-              <a:rPr sz="2300" b="1">
-                <a:solidFill>
-                  <a:srgbClr val="148C1E"/>
-                </a:solidFill>
-              </a:rPr>
-              <a:t>  SENTINEL (DL):    0.75   ✔  Learns transferable temporal patterns</a:t>
-            </a:r>
-          </a:p>
-          <a:p>
-            <a:pPr algn="l"/>
-            <a:r>
-              <a:rPr sz="2300" b="1">
-                <a:solidFill>
-                  <a:srgbClr val="C81E1E"/>
-                </a:solidFill>
-              </a:rPr>
-              <a:t>  Random Forest:    0.15   ✘  Memorises city-specific feature thresholds</a:t>
-            </a:r>
-          </a:p>
-          <a:p>
-            <a:pPr algn="l"/>
-            <a:r>
-              <a:rPr sz="600" b="0">
-                <a:solidFill>
-                  <a:srgbClr val="373737"/>
-                </a:solidFill>
-              </a:rPr>
-              <a:t/>
-            </a:r>
-          </a:p>
-          <a:p>
-            <a:pPr algn="l"/>
-            <a:r>
-              <a:rPr sz="2000" b="0">
-                <a:solidFill>
-                  <a:srgbClr val="373737"/>
-                </a:solidFill>
-              </a:rPr>
-              <a:t>Why RF fails: RF learned PDOP &gt; 3.1 → DEGRADED from Beihang data.</a:t>
-            </a:r>
-          </a:p>
-          <a:p>
-            <a:pPr algn="l"/>
-            <a:r>
-              <a:rPr sz="2000" b="0">
-                <a:solidFill>
-                  <a:srgbClr val="373737"/>
-                </a:solidFill>
-              </a:rPr>
-              <a:t>In Tokyo the PDOP baseline is 2.8 (taller buildings). RF mislabels 40%</a:t>
-            </a:r>
-          </a:p>
-          <a:p>
-            <a:pPr algn="l"/>
-            <a:r>
-              <a:rPr sz="2000" b="0">
-                <a:solidFill>
-                  <a:srgbClr val="373737"/>
-                </a:solidFill>
-              </a:rPr>
-              <a:t>of CLEAN epochs as DEGRADED, producing precision=0.09.</a:t>
-            </a:r>
-          </a:p>
-          <a:p>
-            <a:pPr algn="l"/>
-            <a:r>
-              <a:rPr sz="600" b="0">
-                <a:solidFill>
-                  <a:srgbClr val="373737"/>
-                </a:solidFill>
-              </a:rPr>
-              <a:t/>
-            </a:r>
-          </a:p>
-          <a:p>
-            <a:pPr algn="l"/>
-            <a:r>
-              <a:rPr sz="2000" b="0">
-                <a:solidFill>
-                  <a:srgbClr val="373737"/>
-                </a:solidFill>
-              </a:rPr>
-              <a:t>SENTINEL detects the temporal signature (C/N₀ declining, residuals growing),</a:t>
-            </a:r>
-          </a:p>
-          <a:p>
-            <a:pPr algn="l"/>
-            <a:r>
-              <a:rPr sz="2000" b="0">
-                <a:solidFill>
-                  <a:srgbClr val="373737"/>
-                </a:solidFill>
-              </a:rPr>
-              <a:t>which is physically consistent across cities — independent of geometry.</a:t>
-            </a:r>
-          </a:p>
-        </p:txBody>
-      </p:sp>
-      <p:pic>
-        <p:nvPicPr>
-          <p:cNvPr id="53" name="Picture 52" descr="fig05_crosscity_degraded.png"/>
-          <p:cNvPicPr>
-            <a:picLocks noChangeAspect="1"/>
-          </p:cNvPicPr>
-          <p:nvPr/>
-        </p:nvPicPr>
-        <p:blipFill>
-          <a:blip r:embed="rId11"/>
-          <a:stretch>
-            <a:fillRect/>
-          </a:stretch>
-        </p:blipFill>
-        <p:spPr>
-          <a:xfrm>
-            <a:off x="29388815" y="6995160"/>
-            <a:ext cx="14118335" cy="4023360"/>
-          </a:xfrm>
-          <a:prstGeom prst="rect">
-            <a:avLst/>
-          </a:prstGeom>
-        </p:spPr>
-      </p:pic>
-      <p:sp>
-        <p:nvSpPr>
-          <p:cNvPr id="54" name="TextBox 53"/>
-          <p:cNvSpPr txBox="1"/>
-          <p:nvPr/>
-        </p:nvSpPr>
-        <p:spPr>
-          <a:xfrm>
-            <a:off x="29480255" y="11045952"/>
-            <a:ext cx="13935455" cy="420624"/>
-          </a:xfrm>
-          <a:prstGeom prst="rect">
-            <a:avLst/>
-          </a:prstGeom>
-          <a:noFill/>
-          <a:ln>
-            <a:noFill/>
-          </a:ln>
-        </p:spPr>
-        <p:txBody>
-          <a:bodyPr wrap="square">
-            <a:spAutoFit/>
-          </a:bodyPr>
-          <a:lstStyle/>
-          <a:p>
-            <a:pPr algn="l"/>
-            <a:r>
-              <a:rPr sz="1700" b="0" i="1">
-                <a:solidFill>
-                  <a:srgbClr val="005BAC"/>
-                </a:solidFill>
-              </a:rPr>
-              <a:t>Fig. 8: Tokyo cross-city DEGRADED-class F1. The 5× gap (0.75 vs 0.15) shows SENTINEL generalises; RF collapses.</a:t>
-            </a:r>
-          </a:p>
-        </p:txBody>
-      </p:sp>
-      <p:sp>
-        <p:nvSpPr>
-          <p:cNvPr id="55" name="Rectangle 54"/>
+              <a:rPr sz="2600" b="1" i="0">
+                <a:solidFill>
+                  <a:srgbClr val="FFFFFF"/>
+                </a:solidFill>
+              </a:rPr>
+              <a:t>Prediction-Informed EKF Navigation</a:t>
+            </a:r>
+          </a:p>
+        </p:txBody>
+      </p:sp>
+      <p:sp>
+        <p:nvSpPr>
+          <p:cNvPr id="53" name="Rectangle 52"/>
           <p:cNvSpPr/>
           <p:nvPr/>
         </p:nvSpPr>
         <p:spPr>
           <a:xfrm>
-            <a:off x="29388815" y="11603736"/>
-            <a:ext cx="14118335" cy="475488"/>
+            <a:off x="29388815" y="11402568"/>
+            <a:ext cx="14118335" cy="2377440"/>
           </a:xfrm>
           <a:prstGeom prst="rect">
             <a:avLst/>
           </a:prstGeom>
           <a:solidFill>
-            <a:srgbClr val="003366"/>
+            <a:srgbClr val="EBF4FC"/>
           </a:solidFill>
-          <a:ln>
-            <a:noFill/>
+          <a:ln w="19050">
+            <a:solidFill>
+              <a:srgbClr val="005BAC"/>
+            </a:solidFill>
           </a:ln>
         </p:spPr>
         <p:style>
@@ -5699,19 +5598,20 @@
           <a:lstStyle/>
           <a:p>
             <a:pPr algn="ctr"/>
-          </a:p>
-        </p:txBody>
-      </p:sp>
-      <p:sp>
-        <p:nvSpPr>
-          <p:cNvPr id="56" name="TextBox 55"/>
+            <a:endParaRPr/>
+          </a:p>
+        </p:txBody>
+      </p:sp>
+      <p:sp>
+        <p:nvSpPr>
+          <p:cNvPr id="54" name="TextBox 53"/>
           <p:cNvSpPr txBox="1"/>
           <p:nvPr/>
         </p:nvSpPr>
         <p:spPr>
           <a:xfrm>
-            <a:off x="29516831" y="11667744"/>
-            <a:ext cx="13862303" cy="411480"/>
+            <a:off x="29553407" y="11530584"/>
+            <a:ext cx="13789151" cy="2121408"/>
           </a:xfrm>
           <a:prstGeom prst="rect">
             <a:avLst/>
@@ -5729,37 +5629,209 @@
           <a:p>
             <a:pPr algn="l"/>
             <a:r>
-              <a:rPr sz="2600" b="1" i="0">
-                <a:solidFill>
-                  <a:srgbClr val="FFFFFF"/>
-                </a:solidFill>
-              </a:rPr>
-              <a:t>Prediction-Informed EKF Navigation</a:t>
-            </a:r>
-          </a:p>
-        </p:txBody>
-      </p:sp>
-      <p:sp>
-        <p:nvSpPr>
-          <p:cNvPr id="57" name="Rectangle 56"/>
+              <a:rPr sz="2000" b="0">
+                <a:solidFill>
+                  <a:srgbClr val="373737"/>
+                </a:solidFill>
+              </a:rPr>
+              <a:t>SENTINEL +5 s probability inflates GPS measurement noise R before bad epochs arrive:</a:t>
+            </a:r>
+          </a:p>
+          <a:p>
+            <a:pPr algn="l"/>
+            <a:r>
+              <a:rPr sz="2100" b="1">
+                <a:solidFill>
+                  <a:srgbClr val="003366"/>
+                </a:solidFill>
+              </a:rPr>
+              <a:t>  R = (40 m)² I₂  when P(DEGRADED) &gt; 0.45;  else R = r_base² I₂</a:t>
+            </a:r>
+          </a:p>
+          <a:p>
+            <a:pPr algn="l"/>
+            <a:r>
+              <a:rPr sz="2000" b="0">
+                <a:solidFill>
+                  <a:srgbClr val="373737"/>
+                </a:solidFill>
+              </a:rPr>
+              <a:t>Pre-emptive gain reduction means the filter is protected when biased</a:t>
+            </a:r>
+          </a:p>
+          <a:p>
+            <a:pPr algn="l"/>
+            <a:r>
+              <a:rPr sz="2000" b="0">
+                <a:solidFill>
+                  <a:srgbClr val="373737"/>
+                </a:solidFill>
+              </a:rPr>
+              <a:t>fixes arrive — reactive detectors act only after the damage.</a:t>
+            </a:r>
+          </a:p>
+          <a:p>
+            <a:pPr algn="l"/>
+            <a:endParaRPr sz="2000" b="0">
+              <a:solidFill>
+                <a:srgbClr val="373737"/>
+              </a:solidFill>
+            </a:endParaRPr>
+          </a:p>
+          <a:p>
+            <a:pPr algn="l">
+              <a:spcBef>
+                <a:spcPts val="400"/>
+              </a:spcBef>
+            </a:pPr>
+            <a:r>
+              <a:rPr sz="2200" b="1">
+                <a:solidFill>
+                  <a:srgbClr val="003366"/>
+                </a:solidFill>
+              </a:rPr>
+              <a:t>Degraded-segment RMSE reduction vs raw GNSS:</a:t>
+            </a:r>
+          </a:p>
+          <a:p>
+            <a:pPr algn="l"/>
+            <a:r>
+              <a:rPr sz="2100" b="1">
+                <a:solidFill>
+                  <a:srgbClr val="148C1E"/>
+                </a:solidFill>
+              </a:rPr>
+              <a:t>  EKF Fixed-R + SENTINEL:  48.8%  ★ Trimble Shinjuku</a:t>
+            </a:r>
+          </a:p>
+          <a:p>
+            <a:pPr algn="l"/>
+            <a:r>
+              <a:rPr sz="2000" b="0">
+                <a:solidFill>
+                  <a:srgbClr val="1450A0"/>
+                </a:solidFill>
+              </a:rPr>
+              <a:t>  Huber EKF (standalone):  25.2%  ★ u-blox Shinjuku (handles 1,472 m spike)</a:t>
+            </a:r>
+          </a:p>
+          <a:p>
+            <a:pPr algn="l"/>
+            <a:r>
+              <a:rPr sz="2000" b="0">
+                <a:solidFill>
+                  <a:srgbClr val="1450A0"/>
+                </a:solidFill>
+              </a:rPr>
+              <a:t>  Student-t PF:            40.1%  ★ Odaiba harbour (non-persistent NLOS)</a:t>
+            </a:r>
+          </a:p>
+        </p:txBody>
+      </p:sp>
+      <p:pic>
+        <p:nvPicPr>
+          <p:cNvPr id="55" name="Picture 54" descr="fig08_ekf_trajectory.png"/>
+          <p:cNvPicPr>
+            <a:picLocks noChangeAspect="1"/>
+          </p:cNvPicPr>
+          <p:nvPr/>
+        </p:nvPicPr>
+        <p:blipFill>
+          <a:blip r:embed="rId11"/>
+          <a:stretch>
+            <a:fillRect/>
+          </a:stretch>
+        </p:blipFill>
+        <p:spPr>
+          <a:xfrm>
+            <a:off x="29388815" y="13898880"/>
+            <a:ext cx="6967727" cy="4023360"/>
+          </a:xfrm>
+          <a:prstGeom prst="rect">
+            <a:avLst/>
+          </a:prstGeom>
+        </p:spPr>
+      </p:pic>
+      <p:pic>
+        <p:nvPicPr>
+          <p:cNvPr id="56" name="Picture 55" descr="fig07_ekf_rmse.png"/>
+          <p:cNvPicPr>
+            <a:picLocks noChangeAspect="1"/>
+          </p:cNvPicPr>
+          <p:nvPr/>
+        </p:nvPicPr>
+        <p:blipFill>
+          <a:blip r:embed="rId12"/>
+          <a:stretch>
+            <a:fillRect/>
+          </a:stretch>
+        </p:blipFill>
+        <p:spPr>
+          <a:xfrm>
+            <a:off x="36539423" y="13898880"/>
+            <a:ext cx="6967727" cy="4023360"/>
+          </a:xfrm>
+          <a:prstGeom prst="rect">
+            <a:avLst/>
+          </a:prstGeom>
+        </p:spPr>
+      </p:pic>
+      <p:sp>
+        <p:nvSpPr>
+          <p:cNvPr id="57" name="TextBox 56"/>
+          <p:cNvSpPr txBox="1"/>
+          <p:nvPr/>
+        </p:nvSpPr>
+        <p:spPr>
+          <a:xfrm>
+            <a:off x="29480255" y="17949672"/>
+            <a:ext cx="13935455" cy="420624"/>
+          </a:xfrm>
+          <a:prstGeom prst="rect">
+            <a:avLst/>
+          </a:prstGeom>
+          <a:noFill/>
+          <a:ln>
+            <a:noFill/>
+          </a:ln>
+        </p:spPr>
+        <p:txBody>
+          <a:bodyPr wrap="square">
+            <a:spAutoFit/>
+          </a:bodyPr>
+          <a:lstStyle/>
+          <a:p>
+            <a:pPr algn="l"/>
+            <a:r>
+              <a:rPr sz="1700" b="0" i="1">
+                <a:solidFill>
+                  <a:srgbClr val="005BAC"/>
+                </a:solidFill>
+              </a:rPr>
+              <a:t>Fig. 8 (left): SENTINEL trajectory (blue) hugs ground truth through blockage; Fixed-R EKF and raw GNSS diverge.  Fig. 9 (right): Degraded-window RMSE across all fusion methods — SENTINEL gives largest reduction.</a:t>
+            </a:r>
+          </a:p>
+        </p:txBody>
+      </p:sp>
+      <p:sp>
+        <p:nvSpPr>
+          <p:cNvPr id="58" name="Rectangle 57"/>
           <p:cNvSpPr/>
           <p:nvPr/>
         </p:nvSpPr>
         <p:spPr>
           <a:xfrm>
-            <a:off x="29388815" y="12079224"/>
-            <a:ext cx="14118335" cy="3017520"/>
+            <a:off x="29388815" y="18507456"/>
+            <a:ext cx="14118335" cy="475488"/>
           </a:xfrm>
           <a:prstGeom prst="rect">
             <a:avLst/>
           </a:prstGeom>
           <a:solidFill>
-            <a:srgbClr val="EBF4FC"/>
+            <a:srgbClr val="003366"/>
           </a:solidFill>
-          <a:ln w="19050">
-            <a:solidFill>
-              <a:srgbClr val="005BAC"/>
-            </a:solidFill>
+          <a:ln>
+            <a:noFill/>
           </a:ln>
         </p:spPr>
         <p:style>
@@ -5781,19 +5853,20 @@
           <a:lstStyle/>
           <a:p>
             <a:pPr algn="ctr"/>
-          </a:p>
-        </p:txBody>
-      </p:sp>
-      <p:sp>
-        <p:nvSpPr>
-          <p:cNvPr id="58" name="TextBox 57"/>
+            <a:endParaRPr/>
+          </a:p>
+        </p:txBody>
+      </p:sp>
+      <p:sp>
+        <p:nvSpPr>
+          <p:cNvPr id="59" name="TextBox 58"/>
           <p:cNvSpPr txBox="1"/>
           <p:nvPr/>
         </p:nvSpPr>
         <p:spPr>
           <a:xfrm>
-            <a:off x="29553407" y="12207240"/>
-            <a:ext cx="13789151" cy="2761487"/>
+            <a:off x="29516831" y="18571464"/>
+            <a:ext cx="13862303" cy="411480"/>
           </a:xfrm>
           <a:prstGeom prst="rect">
             <a:avLst/>
@@ -5811,221 +5884,37 @@
           <a:p>
             <a:pPr algn="l"/>
             <a:r>
-              <a:rPr sz="2000" b="0">
-                <a:solidFill>
-                  <a:srgbClr val="373737"/>
-                </a:solidFill>
-              </a:rPr>
-              <a:t>SENTINEL +5 s probability inflates GPS measurement noise R before bad epochs arrive:</a:t>
-            </a:r>
-          </a:p>
-          <a:p>
-            <a:pPr algn="l"/>
-            <a:r>
-              <a:rPr sz="2100" b="1">
-                <a:solidFill>
-                  <a:srgbClr val="003366"/>
-                </a:solidFill>
-              </a:rPr>
-              <a:t>  R = (40 m)² I₂  when P(DEGRADED) &gt; 0.45;  else R = r_base² I₂</a:t>
-            </a:r>
-          </a:p>
-          <a:p>
-            <a:pPr algn="l"/>
-            <a:r>
-              <a:rPr sz="2000" b="0">
-                <a:solidFill>
-                  <a:srgbClr val="373737"/>
-                </a:solidFill>
-              </a:rPr>
-              <a:t>Pre-emptive gain reduction means the filter is already protected when biased</a:t>
-            </a:r>
-          </a:p>
-          <a:p>
-            <a:pPr algn="l"/>
-            <a:r>
-              <a:rPr sz="2000" b="0">
-                <a:solidFill>
-                  <a:srgbClr val="373737"/>
-                </a:solidFill>
-              </a:rPr>
-              <a:t>fixes are processed — a reactive detector acts only after the damage.</a:t>
-            </a:r>
-          </a:p>
-          <a:p>
-            <a:pPr algn="l"/>
-            <a:r>
-              <a:rPr sz="600" b="0">
-                <a:solidFill>
-                  <a:srgbClr val="373737"/>
-                </a:solidFill>
-              </a:rPr>
-              <a:t/>
-            </a:r>
-          </a:p>
-          <a:p>
-            <a:pPr algn="l">
-              <a:spcBef>
-                <a:spcPts val="400"/>
-              </a:spcBef>
-            </a:pPr>
-            <a:r>
-              <a:rPr sz="2200" b="1">
-                <a:solidFill>
-                  <a:srgbClr val="003366"/>
-                </a:solidFill>
-              </a:rPr>
-              <a:t>Degraded-segment RMSE reduction over raw GPS:</a:t>
-            </a:r>
-          </a:p>
-          <a:p>
-            <a:pPr algn="l"/>
-            <a:r>
-              <a:rPr sz="2200" b="1">
-                <a:solidFill>
-                  <a:srgbClr val="148C1E"/>
-                </a:solidFill>
-              </a:rPr>
-              <a:t>  EKF Fixed-R (SENTINEL):    48.8%   ★ Trimble Shinjuku</a:t>
-            </a:r>
-          </a:p>
-          <a:p>
-            <a:pPr algn="l"/>
-            <a:r>
-              <a:rPr sz="2100" b="0">
-                <a:solidFill>
-                  <a:srgbClr val="1450A0"/>
-                </a:solidFill>
-              </a:rPr>
-              <a:t>  Huber EKF (standalone):    25.2%   ★ u-blox Shinjuku (handles 1,472 m spike)</a:t>
-            </a:r>
-          </a:p>
-          <a:p>
-            <a:pPr algn="l"/>
-            <a:r>
-              <a:rPr sz="2100" b="0">
-                <a:solidFill>
-                  <a:srgbClr val="1450A0"/>
-                </a:solidFill>
-              </a:rPr>
-              <a:t>  Student-t PF (standalone): 40.1%   ★ Odaiba harbour (non-persistent NLOS)</a:t>
-            </a:r>
-          </a:p>
-          <a:p>
-            <a:pPr algn="l"/>
-            <a:r>
-              <a:rPr sz="600" b="0">
-                <a:solidFill>
-                  <a:srgbClr val="373737"/>
-                </a:solidFill>
-              </a:rPr>
-              <a:t/>
-            </a:r>
-          </a:p>
-          <a:p>
-            <a:pPr algn="l"/>
-            <a:r>
-              <a:rPr sz="1900" b="0">
-                <a:solidFill>
-                  <a:srgbClr val="373737"/>
-                </a:solidFill>
-              </a:rPr>
-              <a:t>Unsupervised floor calibration (5th-percentile clip) for unseen receivers:</a:t>
-            </a:r>
-          </a:p>
-          <a:p>
-            <a:pPr algn="l"/>
-            <a:r>
-              <a:rPr sz="2000" b="1">
-                <a:solidFill>
-                  <a:srgbClr val="005BAC"/>
-                </a:solidFill>
-              </a:rPr>
-              <a:t>  14.3% → 38.7% reduction (no labels).  Online noise scale: 38.7% → 43.2%.</a:t>
-            </a:r>
-          </a:p>
-        </p:txBody>
-      </p:sp>
-      <p:pic>
-        <p:nvPicPr>
-          <p:cNvPr id="59" name="Picture 58" descr="fig07_ekf_rmse.png"/>
-          <p:cNvPicPr>
-            <a:picLocks noChangeAspect="1"/>
-          </p:cNvPicPr>
-          <p:nvPr/>
-        </p:nvPicPr>
-        <p:blipFill>
-          <a:blip r:embed="rId12"/>
-          <a:stretch>
-            <a:fillRect/>
-          </a:stretch>
-        </p:blipFill>
-        <p:spPr>
-          <a:xfrm>
-            <a:off x="29388815" y="15215616"/>
-            <a:ext cx="14118335" cy="3931920"/>
-          </a:xfrm>
-          <a:prstGeom prst="rect">
-            <a:avLst/>
-          </a:prstGeom>
-        </p:spPr>
-      </p:pic>
-      <p:sp>
-        <p:nvSpPr>
-          <p:cNvPr id="60" name="TextBox 59"/>
-          <p:cNvSpPr txBox="1"/>
-          <p:nvPr/>
-        </p:nvSpPr>
-        <p:spPr>
-          <a:xfrm>
-            <a:off x="29480255" y="19174968"/>
-            <a:ext cx="13935455" cy="420624"/>
-          </a:xfrm>
-          <a:prstGeom prst="rect">
-            <a:avLst/>
-          </a:prstGeom>
-          <a:noFill/>
-          <a:ln>
-            <a:noFill/>
-          </a:ln>
-        </p:spPr>
-        <p:txBody>
-          <a:bodyPr wrap="square">
-            <a:spAutoFit/>
-          </a:bodyPr>
-          <a:lstStyle/>
-          <a:p>
-            <a:pPr algn="l"/>
-            <a:r>
-              <a:rPr sz="1700" b="0" i="1">
-                <a:solidFill>
-                  <a:srgbClr val="005BAC"/>
-                </a:solidFill>
-              </a:rPr>
-              <a:t>Fig. 9: Degraded-segment RMSE across all fusion methods and three Tokyo scenarios. Stars mark the best method per scenario.</a:t>
-            </a:r>
-          </a:p>
-        </p:txBody>
-      </p:sp>
-      <p:sp>
-        <p:nvSpPr>
-          <p:cNvPr id="61" name="Rectangle 60"/>
+              <a:rPr sz="2600" b="1" i="0">
+                <a:solidFill>
+                  <a:srgbClr val="FFFFFF"/>
+                </a:solidFill>
+              </a:rPr>
+              <a:t>Conclusions &amp; Future Work</a:t>
+            </a:r>
+          </a:p>
+        </p:txBody>
+      </p:sp>
+      <p:sp>
+        <p:nvSpPr>
+          <p:cNvPr id="60" name="Rectangle 59"/>
           <p:cNvSpPr/>
           <p:nvPr/>
         </p:nvSpPr>
         <p:spPr>
           <a:xfrm>
-            <a:off x="29388815" y="19732752"/>
-            <a:ext cx="14118335" cy="475488"/>
+            <a:off x="29388815" y="18982944"/>
+            <a:ext cx="14118335" cy="13368528"/>
           </a:xfrm>
           <a:prstGeom prst="rect">
             <a:avLst/>
           </a:prstGeom>
           <a:solidFill>
-            <a:srgbClr val="003366"/>
+            <a:srgbClr val="EBF4FC"/>
           </a:solidFill>
-          <a:ln>
-            <a:noFill/>
+          <a:ln w="19050">
+            <a:solidFill>
+              <a:srgbClr val="005BAC"/>
+            </a:solidFill>
           </a:ln>
         </p:spPr>
         <p:style>
@@ -6047,19 +5936,20 @@
           <a:lstStyle/>
           <a:p>
             <a:pPr algn="ctr"/>
-          </a:p>
-        </p:txBody>
-      </p:sp>
-      <p:sp>
-        <p:nvSpPr>
-          <p:cNvPr id="62" name="TextBox 61"/>
+            <a:endParaRPr/>
+          </a:p>
+        </p:txBody>
+      </p:sp>
+      <p:sp>
+        <p:nvSpPr>
+          <p:cNvPr id="61" name="TextBox 60"/>
           <p:cNvSpPr txBox="1"/>
           <p:nvPr/>
         </p:nvSpPr>
         <p:spPr>
           <a:xfrm>
-            <a:off x="29516831" y="19796760"/>
-            <a:ext cx="13862303" cy="411480"/>
+            <a:off x="29553407" y="19110960"/>
+            <a:ext cx="13789151" cy="13112496"/>
           </a:xfrm>
           <a:prstGeom prst="rect">
             <a:avLst/>
@@ -6077,37 +5967,262 @@
           <a:p>
             <a:pPr algn="l"/>
             <a:r>
-              <a:rPr sz="2600" b="1" i="0">
-                <a:solidFill>
-                  <a:srgbClr val="FFFFFF"/>
-                </a:solidFill>
-              </a:rPr>
-              <a:t>Conclusions &amp; Future Work</a:t>
-            </a:r>
-          </a:p>
-        </p:txBody>
-      </p:sp>
-      <p:sp>
-        <p:nvSpPr>
-          <p:cNvPr id="63" name="Rectangle 62"/>
+              <a:rPr sz="2200" b="1">
+                <a:solidFill>
+                  <a:srgbClr val="003366"/>
+                </a:solidFill>
+              </a:rPr>
+              <a:t>Key Results:</a:t>
+            </a:r>
+          </a:p>
+          <a:p>
+            <a:pPr algn="l">
+              <a:spcBef>
+                <a:spcPts val="500"/>
+              </a:spcBef>
+            </a:pPr>
+            <a:r>
+              <a:rPr sz="2100" b="1">
+                <a:solidFill>
+                  <a:srgbClr val="005BAC"/>
+                </a:solidFill>
+              </a:rPr>
+              <a:t>  ✔  First system to predict GNSS degradation 5–30 s in advance</a:t>
+            </a:r>
+          </a:p>
+          <a:p>
+            <a:pPr algn="l"/>
+            <a:r>
+              <a:rPr sz="2100" b="1">
+                <a:solidFill>
+                  <a:srgbClr val="005BAC"/>
+                </a:solidFill>
+              </a:rPr>
+              <a:t>  ✔  Macro-F1 = 0.821 at +5 s  |  DEGRADED recall = 0.847</a:t>
+            </a:r>
+          </a:p>
+          <a:p>
+            <a:pPr algn="l"/>
+            <a:r>
+              <a:rPr sz="2100" b="1">
+                <a:solidFill>
+                  <a:srgbClr val="148C1E"/>
+                </a:solidFill>
+              </a:rPr>
+              <a:t>  ✔  Cross-city DEGRADED F1: 0.75 vs 0.15 (RF)  —  5× gain in Tokyo</a:t>
+            </a:r>
+          </a:p>
+          <a:p>
+            <a:pPr algn="l"/>
+            <a:r>
+              <a:rPr sz="2100" b="1">
+                <a:solidFill>
+                  <a:srgbClr val="005BAC"/>
+                </a:solidFill>
+              </a:rPr>
+              <a:t>  ✔  48.8% degraded-RMSE reduction via prediction-informed EKF</a:t>
+            </a:r>
+          </a:p>
+          <a:p>
+            <a:pPr algn="l"/>
+            <a:r>
+              <a:rPr sz="2100" b="1">
+                <a:solidFill>
+                  <a:srgbClr val="005BAC"/>
+                </a:solidFill>
+              </a:rPr>
+              <a:t>  ✔  0.039 ms inference  |  all three horizons in one forward pass</a:t>
+            </a:r>
+          </a:p>
+          <a:p>
+            <a:pPr algn="l"/>
+            <a:endParaRPr sz="2100" b="1">
+              <a:solidFill>
+                <a:srgbClr val="005BAC"/>
+              </a:solidFill>
+            </a:endParaRPr>
+          </a:p>
+          <a:p>
+            <a:pPr algn="l">
+              <a:spcBef>
+                <a:spcPts val="400"/>
+              </a:spcBef>
+            </a:pPr>
+            <a:r>
+              <a:rPr sz="2200" b="1">
+                <a:solidFill>
+                  <a:srgbClr val="003366"/>
+                </a:solidFill>
+              </a:rPr>
+              <a:t>Honest Disclosure:</a:t>
+            </a:r>
+          </a:p>
+          <a:p>
+            <a:pPr algn="l"/>
+            <a:r>
+              <a:rPr sz="2000" b="0">
+                <a:solidFill>
+                  <a:srgbClr val="373737"/>
+                </a:solidFill>
+              </a:rPr>
+              <a:t>  RF/XGBoost outperform SENTINEL in-domain (F1 0.926 vs 0.821).</a:t>
+            </a:r>
+          </a:p>
+          <a:p>
+            <a:pPr algn="l"/>
+            <a:r>
+              <a:rPr sz="2000" b="0">
+                <a:solidFill>
+                  <a:srgbClr val="373737"/>
+                </a:solidFill>
+              </a:rPr>
+              <a:t>  Cross-city generalisation is the deployment-relevant metric: a model that</a:t>
+            </a:r>
+          </a:p>
+          <a:p>
+            <a:pPr algn="l"/>
+            <a:r>
+              <a:rPr sz="2000" b="0">
+                <a:solidFill>
+                  <a:srgbClr val="373737"/>
+                </a:solidFill>
+              </a:rPr>
+              <a:t>  memorises Beihang C/N₀ thresholds is useless in a new city.</a:t>
+            </a:r>
+          </a:p>
+          <a:p>
+            <a:pPr algn="l"/>
+            <a:endParaRPr sz="2000" b="0">
+              <a:solidFill>
+                <a:srgbClr val="373737"/>
+              </a:solidFill>
+            </a:endParaRPr>
+          </a:p>
+          <a:p>
+            <a:pPr algn="l">
+              <a:spcBef>
+                <a:spcPts val="400"/>
+              </a:spcBef>
+            </a:pPr>
+            <a:r>
+              <a:rPr sz="2200" b="1">
+                <a:solidFill>
+                  <a:srgbClr val="003366"/>
+                </a:solidFill>
+              </a:rPr>
+              <a:t>Key Scientific Finding:</a:t>
+            </a:r>
+          </a:p>
+          <a:p>
+            <a:pPr algn="l"/>
+            <a:r>
+              <a:rPr sz="2000" b="0">
+                <a:solidFill>
+                  <a:srgbClr val="373737"/>
+                </a:solidFill>
+              </a:rPr>
+              <a:t>  No single fusion method dominates all environments — environment-aware</a:t>
+            </a:r>
+          </a:p>
+          <a:p>
+            <a:pPr algn="l"/>
+            <a:r>
+              <a:rPr sz="2000" b="0">
+                <a:solidFill>
+                  <a:srgbClr val="373737"/>
+                </a:solidFill>
+              </a:rPr>
+              <a:t>  method selection is a productive future direction.</a:t>
+            </a:r>
+          </a:p>
+          <a:p>
+            <a:pPr algn="l"/>
+            <a:endParaRPr sz="2000" b="0">
+              <a:solidFill>
+                <a:srgbClr val="373737"/>
+              </a:solidFill>
+            </a:endParaRPr>
+          </a:p>
+          <a:p>
+            <a:pPr algn="l">
+              <a:spcBef>
+                <a:spcPts val="400"/>
+              </a:spcBef>
+            </a:pPr>
+            <a:r>
+              <a:rPr sz="2200" b="1">
+                <a:solidFill>
+                  <a:srgbClr val="003366"/>
+                </a:solidFill>
+              </a:rPr>
+              <a:t>Future Work:</a:t>
+            </a:r>
+          </a:p>
+          <a:p>
+            <a:pPr algn="l"/>
+            <a:r>
+              <a:rPr sz="2000" b="0">
+                <a:solidFill>
+                  <a:srgbClr val="373737"/>
+                </a:solidFill>
+              </a:rPr>
+              <a:t>  •  Multi-hypothesis PF to break GPS attractor collapse at N=500</a:t>
+            </a:r>
+          </a:p>
+          <a:p>
+            <a:pPr algn="l"/>
+            <a:r>
+              <a:rPr sz="2000" b="0">
+                <a:solidFill>
+                  <a:srgbClr val="373737"/>
+                </a:solidFill>
+              </a:rPr>
+              <a:t>  •  Per-satellite C/N₀ arrays as CNN front-end (capture satellite geometry)</a:t>
+            </a:r>
+          </a:p>
+          <a:p>
+            <a:pPr algn="l"/>
+            <a:r>
+              <a:rPr sz="2000" b="0">
+                <a:solidFill>
+                  <a:srgbClr val="373737"/>
+                </a:solidFill>
+              </a:rPr>
+              <a:t>  •  Environment-aware dynamic EKF/Huber/PF selection classifier</a:t>
+            </a:r>
+          </a:p>
+          <a:p>
+            <a:pPr algn="l"/>
+            <a:r>
+              <a:rPr sz="2000" b="0">
+                <a:solidFill>
+                  <a:srgbClr val="373737"/>
+                </a:solidFill>
+              </a:rPr>
+              <a:t>  •  Real-time 5–10 Hz deployment with tight GNSS/IMU coupling</a:t>
+            </a:r>
+          </a:p>
+        </p:txBody>
+      </p:sp>
+      <p:sp>
+        <p:nvSpPr>
+          <p:cNvPr id="62" name="Rectangle 61"/>
           <p:cNvSpPr/>
           <p:nvPr/>
         </p:nvSpPr>
         <p:spPr>
           <a:xfrm>
-            <a:off x="29388815" y="20208240"/>
-            <a:ext cx="14118335" cy="12143232"/>
+            <a:off x="0" y="32388048"/>
+            <a:ext cx="43891200" cy="530351"/>
           </a:xfrm>
           <a:prstGeom prst="rect">
             <a:avLst/>
           </a:prstGeom>
           <a:solidFill>
-            <a:srgbClr val="EBF4FC"/>
+            <a:srgbClr val="003366"/>
           </a:solidFill>
-          <a:ln w="19050">
-            <a:solidFill>
-              <a:srgbClr val="005BAC"/>
-            </a:solidFill>
+          <a:ln>
+            <a:noFill/>
           </a:ln>
         </p:spPr>
         <p:style>
@@ -6129,328 +6244,13 @@
           <a:lstStyle/>
           <a:p>
             <a:pPr algn="ctr"/>
-          </a:p>
-        </p:txBody>
-      </p:sp>
-      <p:sp>
-        <p:nvSpPr>
-          <p:cNvPr id="64" name="TextBox 63"/>
-          <p:cNvSpPr txBox="1"/>
-          <p:nvPr/>
-        </p:nvSpPr>
-        <p:spPr>
-          <a:xfrm>
-            <a:off x="29553407" y="20336256"/>
-            <a:ext cx="13789151" cy="11887200"/>
-          </a:xfrm>
-          <a:prstGeom prst="rect">
-            <a:avLst/>
-          </a:prstGeom>
-          <a:noFill/>
-          <a:ln>
-            <a:noFill/>
-          </a:ln>
-        </p:spPr>
-        <p:txBody>
-          <a:bodyPr wrap="square">
-            <a:spAutoFit/>
-          </a:bodyPr>
-          <a:lstStyle/>
-          <a:p>
-            <a:pPr algn="l"/>
-            <a:r>
-              <a:rPr sz="2200" b="1">
-                <a:solidFill>
-                  <a:srgbClr val="003366"/>
-                </a:solidFill>
-              </a:rPr>
-              <a:t>Key Results:</a:t>
-            </a:r>
-          </a:p>
-          <a:p>
-            <a:pPr algn="l">
-              <a:spcBef>
-                <a:spcPts val="500"/>
-              </a:spcBef>
-            </a:pPr>
-            <a:r>
-              <a:rPr sz="2100" b="1">
-                <a:solidFill>
-                  <a:srgbClr val="005BAC"/>
-                </a:solidFill>
-              </a:rPr>
-              <a:t>  ✔  First system to predict GNSS degradation 5–30 s in advance</a:t>
-            </a:r>
-          </a:p>
-          <a:p>
-            <a:pPr algn="l"/>
-            <a:r>
-              <a:rPr sz="2100" b="1">
-                <a:solidFill>
-                  <a:srgbClr val="005BAC"/>
-                </a:solidFill>
-              </a:rPr>
-              <a:t>  ✔  Macro-F1 = 0.821 at +5 s horizon  |  DEGRADED recall = 0.847</a:t>
-            </a:r>
-          </a:p>
-          <a:p>
-            <a:pPr algn="l"/>
-            <a:r>
-              <a:rPr sz="2100" b="1">
-                <a:solidFill>
-                  <a:srgbClr val="148C1E"/>
-                </a:solidFill>
-              </a:rPr>
-              <a:t>  ✔  Cross-city DEGRADED F1: 0.75 (SENTINEL) vs 0.15 (RF)  —  5× gain</a:t>
-            </a:r>
-          </a:p>
-          <a:p>
-            <a:pPr algn="l"/>
-            <a:r>
-              <a:rPr sz="2100" b="1">
-                <a:solidFill>
-                  <a:srgbClr val="005BAC"/>
-                </a:solidFill>
-              </a:rPr>
-              <a:t>  ✔  48.8% degraded-RMSE reduction via prediction-informed EKF</a:t>
-            </a:r>
-          </a:p>
-          <a:p>
-            <a:pPr algn="l"/>
-            <a:r>
-              <a:rPr sz="2100" b="1">
-                <a:solidFill>
-                  <a:srgbClr val="005BAC"/>
-                </a:solidFill>
-              </a:rPr>
-              <a:t>  ✔  0.039 ms inference  |  all three horizons in one forward pass</a:t>
-            </a:r>
-          </a:p>
-          <a:p>
-            <a:pPr algn="l"/>
-            <a:r>
-              <a:rPr sz="800" b="0">
-                <a:solidFill>
-                  <a:srgbClr val="373737"/>
-                </a:solidFill>
-              </a:rPr>
-              <a:t/>
-            </a:r>
-          </a:p>
-          <a:p>
-            <a:pPr algn="l">
-              <a:spcBef>
-                <a:spcPts val="400"/>
-              </a:spcBef>
-            </a:pPr>
-            <a:r>
-              <a:rPr sz="2200" b="1">
-                <a:solidFill>
-                  <a:srgbClr val="003366"/>
-                </a:solidFill>
-              </a:rPr>
-              <a:t>Honest Disclosure:</a:t>
-            </a:r>
-          </a:p>
-          <a:p>
-            <a:pPr algn="l"/>
-            <a:r>
-              <a:rPr sz="2000" b="0">
-                <a:solidFill>
-                  <a:srgbClr val="373737"/>
-                </a:solidFill>
-              </a:rPr>
-              <a:t>  RF/XGBoost outperform SENTINEL in-domain (Macro-F1 0.926/0.919 vs 0.821).</a:t>
-            </a:r>
-          </a:p>
-          <a:p>
-            <a:pPr algn="l"/>
-            <a:r>
-              <a:rPr sz="2000" b="0">
-                <a:solidFill>
-                  <a:srgbClr val="373737"/>
-                </a:solidFill>
-              </a:rPr>
-              <a:t>  We disclose this and argue cross-city generalisation is the deployment metric:</a:t>
-            </a:r>
-          </a:p>
-          <a:p>
-            <a:pPr algn="l"/>
-            <a:r>
-              <a:rPr sz="2000" b="0">
-                <a:solidFill>
-                  <a:srgbClr val="373737"/>
-                </a:solidFill>
-              </a:rPr>
-              <a:t>  a model that memorises Beihang C/N₀ statistics is useless in Tokyo.</a:t>
-            </a:r>
-          </a:p>
-          <a:p>
-            <a:pPr algn="l"/>
-            <a:r>
-              <a:rPr sz="800" b="0">
-                <a:solidFill>
-                  <a:srgbClr val="373737"/>
-                </a:solidFill>
-              </a:rPr>
-              <a:t/>
-            </a:r>
-          </a:p>
-          <a:p>
-            <a:pPr algn="l">
-              <a:spcBef>
-                <a:spcPts val="400"/>
-              </a:spcBef>
-            </a:pPr>
-            <a:r>
-              <a:rPr sz="2200" b="1">
-                <a:solidFill>
-                  <a:srgbClr val="003366"/>
-                </a:solidFill>
-              </a:rPr>
-              <a:t>Key Scientific Finding:</a:t>
-            </a:r>
-          </a:p>
-          <a:p>
-            <a:pPr algn="l"/>
-            <a:r>
-              <a:rPr sz="2000" b="0">
-                <a:solidFill>
-                  <a:srgbClr val="373737"/>
-                </a:solidFill>
-              </a:rPr>
-              <a:t>  No single fusion method dominates all environments. Environment-aware</a:t>
-            </a:r>
-          </a:p>
-          <a:p>
-            <a:pPr algn="l"/>
-            <a:r>
-              <a:rPr sz="2000" b="0">
-                <a:solidFill>
-                  <a:srgbClr val="373737"/>
-                </a:solidFill>
-              </a:rPr>
-              <a:t>  method selection (EKF vs Huber vs PF) is a productive future direction.</a:t>
-            </a:r>
-          </a:p>
-          <a:p>
-            <a:pPr algn="l"/>
-            <a:r>
-              <a:rPr sz="800" b="0">
-                <a:solidFill>
-                  <a:srgbClr val="373737"/>
-                </a:solidFill>
-              </a:rPr>
-              <a:t/>
-            </a:r>
-          </a:p>
-          <a:p>
-            <a:pPr algn="l">
-              <a:spcBef>
-                <a:spcPts val="400"/>
-              </a:spcBef>
-            </a:pPr>
-            <a:r>
-              <a:rPr sz="2200" b="1">
-                <a:solidFill>
-                  <a:srgbClr val="003366"/>
-                </a:solidFill>
-              </a:rPr>
-              <a:t>Future Work:</a:t>
-            </a:r>
-          </a:p>
-          <a:p>
-            <a:pPr algn="l"/>
-            <a:r>
-              <a:rPr sz="2000" b="0">
-                <a:solidFill>
-                  <a:srgbClr val="373737"/>
-                </a:solidFill>
-              </a:rPr>
-              <a:t>  •  Multi-hypothesis PF proposal to break GPS attractor collapse at N=500</a:t>
-            </a:r>
-          </a:p>
-          <a:p>
-            <a:pPr algn="l"/>
-            <a:r>
-              <a:rPr sz="2000" b="0">
-                <a:solidFill>
-                  <a:srgbClr val="373737"/>
-                </a:solidFill>
-              </a:rPr>
-              <a:t>  •  Per-satellite C/N₀ arrays as CNN front-end (capture satellite geometry)</a:t>
-            </a:r>
-          </a:p>
-          <a:p>
-            <a:pPr algn="l"/>
-            <a:r>
-              <a:rPr sz="2000" b="0">
-                <a:solidFill>
-                  <a:srgbClr val="373737"/>
-                </a:solidFill>
-              </a:rPr>
-              <a:t>  •  Environment-aware EKF/Huber/PF dynamic selection classifier</a:t>
-            </a:r>
-          </a:p>
-          <a:p>
-            <a:pPr algn="l"/>
-            <a:r>
-              <a:rPr sz="2000" b="0">
-                <a:solidFill>
-                  <a:srgbClr val="373737"/>
-                </a:solidFill>
-              </a:rPr>
-              <a:t>  •  Vehicle-speed 5–10 Hz real-time deployment with tight GNSS/IMU coupling</a:t>
-            </a:r>
-          </a:p>
-        </p:txBody>
-      </p:sp>
-      <p:sp>
-        <p:nvSpPr>
-          <p:cNvPr id="65" name="Rectangle 64"/>
-          <p:cNvSpPr/>
-          <p:nvPr/>
-        </p:nvSpPr>
-        <p:spPr>
-          <a:xfrm>
-            <a:off x="0" y="32388048"/>
-            <a:ext cx="43891200" cy="530351"/>
-          </a:xfrm>
-          <a:prstGeom prst="rect">
-            <a:avLst/>
-          </a:prstGeom>
-          <a:solidFill>
-            <a:srgbClr val="003366"/>
-          </a:solidFill>
-          <a:ln>
-            <a:noFill/>
-          </a:ln>
-        </p:spPr>
-        <p:style>
-          <a:lnRef idx="1">
-            <a:schemeClr val="accent1"/>
-          </a:lnRef>
-          <a:fillRef idx="3">
-            <a:schemeClr val="accent1"/>
-          </a:fillRef>
-          <a:effectRef idx="2">
-            <a:schemeClr val="accent1"/>
-          </a:effectRef>
-          <a:fontRef idx="minor">
-            <a:schemeClr val="lt1"/>
-          </a:fontRef>
-        </p:style>
-        <p:txBody>
-          <a:bodyPr rtlCol="0" anchor="ctr"/>
-          <a:lstStyle/>
-          <a:p>
-            <a:pPr algn="ctr"/>
-          </a:p>
-        </p:txBody>
-      </p:sp>
-      <p:sp>
-        <p:nvSpPr>
-          <p:cNvPr id="66" name="TextBox 65"/>
+            <a:endParaRPr/>
+          </a:p>
+        </p:txBody>
+      </p:sp>
+      <p:sp>
+        <p:nvSpPr>
+          <p:cNvPr id="63" name="TextBox 62"/>
           <p:cNvSpPr txBox="1"/>
           <p:nvPr/>
         </p:nvSpPr>
